--- a/slides/study-mpc/study-mpc.pptx
+++ b/slides/study-mpc/study-mpc.pptx
@@ -609,7 +609,7 @@
           <a:lstStyle/>
           <a:p>
             <a:r>
-              <a:t>NMPC의 비용은 대부분 참조와의 차이를 벌하는 이차식이다. 출력 y가 상태와 입력의 선형 함수이면 선형 최소제곱 꼴이 되어, Gauss-Newton 근사가 정확한 Hessian을 준다. 그래서 풀이가 빠르고 안정적이다. 가중치는 단위가 다른 항을 섞으므로 크기를 맞춰야 하며, 종단 비용은 짧은 지평의 끝에서 목표 쪽으로 진행하게 하는 역할을 한다. 장애물처럼 계단 같은 항은 비용에 넣지 않고 다음 장의 제약으로 보낸다.</a:t>
+              <a:t>NMPC의 비용은 대부분 참조와의 차이를 페널티를 주는 이차식이다. 출력 y가 상태와 입력의 선형 함수이면 선형 최소제곱 꼴이 되어, Gauss-Newton 근사가 정확한 Hessian을 준다. 그래서 풀이가 빠르고 안정적이다. 가중치는 단위가 다른 항을 섞으므로 크기를 맞춰야 하며, 종단 비용은 짧은 horizon의 끝에서 목표 쪽으로 진행하게 하는 역할을 한다. 장애물처럼 계단 같은 항은 비용에 넣지 않고 다음 장의 제약으로 보낸다.</a:t>
             </a:r>
           </a:p>
         </p:txBody>
@@ -679,7 +679,7 @@
           <a:lstStyle/>
           <a:p>
             <a:r>
-              <a:t>격자 지도의 장애물은 계단 함수라 미분이 없고, 기호 계산 도구는 격자를 기호 위치로 읽지 못한다. 실무 해법은 장애물을 매 주기 수치로 처리해 단순한 제약으로 넘기는 것이다. 노드마다 가장 가까운 장애물 점을 거리 변환으로 찾고, 그 점에서 장애물 바깥을 향하는 법선으로 반평면을 만든다. 제약은 선형이고 값만 파라미터로 바뀌므로 코드를 다시 생성할 필요가 없다. 다만 접평면은 지금의 해에 매달려 있으므로, 해가 움직이면 다시 계산해야 한다.</a:t>
+              <a:t>격자 지도의 장애물은 계단 함수라 미분이 없고, 기호 계산 도구는 격자를 기호 위치로 읽지 못한다. 실무 해법은 장애물을 매 주기 수치로 처리해 단순한 제약으로 넘기는 것이다. 노드마다 가장 가까운 장애물 점을 거리 변환으로 찾고, 그 점에서 장애물 바깥을 향하는 법선으로 반평면을 만든다. 제약은 선형이고 값만 파라미터로 바뀌므로 코드를 다시 생성할 필요가 없다. 다만 접평면은 지금의 해에 의존하므로, 해가 움직이면 다시 계산해야 한다.</a:t>
             </a:r>
           </a:p>
         </p:txBody>
@@ -749,7 +749,7 @@
           <a:lstStyle/>
           <a:p>
             <a:r>
-              <a:t>hard 제약은 반드시 지켜지지만, 지킬 수 없는 상황에서는 해가 없다. 실제 로봇에서는 외란이나 나쁜 초기해 때문에 그런 순간이 온다. 그래서 제약마다 slack 변수를 두고 그 크기를 비용으로 벌한다. 벌점의 꼴이 중요하다. L1 벌점은 가중치가 그 제약의 라그랑주 승수보다 크기만 하면 hard 제약과 똑같은 해를 준다. 정확한 벌점이라 부른다. 이차 벌점은 매끄럽지만 가중치를 아무리 키워도 조금씩 넘는다. 실무에서는 둘을 함께 쓴다.</a:t>
+              <a:t>hard 제약은 반드시 지켜지지만, 지킬 수 없는 상황에서는 해가 없다. 실제 로봇에서는 외란이나 나쁜 초기해 때문에 그런 순간이 온다. 그래서 제약마다 slack 변수를 두고 그 크기에 비용으로 페널티를 준다. 페널티의 꼴이 중요하다. L1 페널티는 가중치가 그 제약의 라그랑주 승수보다 크기만 하면 hard 제약과 똑같은 해를 준다. 이를 exact penalty라 부른다. 이차 페널티는 매끄럽지만 가중치를 아무리 키워도 조금씩 넘는다. 실무에서는 둘을 함께 쓴다.</a:t>
             </a:r>
           </a:p>
         </p:txBody>
@@ -819,7 +819,7 @@
           <a:lstStyle/>
           <a:p>
             <a:r>
-              <a:t>표본 기반 MPC에서 비용 항 하나로 처리하던 것들을 기울기 기반 MPC로 옮기면 세 갈래로 나뉜다. 매끄러운 것은 비용으로 남고, 계단 같은 것은 제약으로 가고, 목표 쪽은 종단 비용이 된다. 특히 안전에 관한 것을 제약으로 두는 것이 중요하다. 그래야 3장에서 볼 튜브나 확률 제약이 그 제약의 여유를 조일 수 있다.</a:t>
+              <a:t>샘플 기반 MPC에서 비용 항 하나로 처리하던 것들을 gradient 기반 MPC로 옮기면 세 갈래로 나뉜다. 매끄러운 것은 비용으로 남고, 계단 같은 것은 제약으로 가고, 목표 쪽은 종단 비용이 된다. 특히 안전에 관한 것을 제약으로 두는 것이 중요하다. 그래야 3장에서 볼 튜브나 확률 제약이 그 제약의 여유를 조일 수 있다.</a:t>
             </a:r>
           </a:p>
         </p:txBody>
@@ -889,7 +889,7 @@
           <a:lstStyle/>
           <a:p>
             <a:r>
-              <a:t>한꺼번에 모든 것을 정교하게 만들면 무엇이 효과였는지 알 수 없다. 가장 단순한 판으로 시작해 폐루프 실험에서 문제가 드러나는 곳만 바꾸는 것이 좋다. 예를 들어 지연 때문에 출렁이면 모델에 지연을 넣고, 좁은 틈에서 실패하면 장애물 제약을 고친다.</a:t>
+              <a:t>한꺼번에 모든 것을 정교하게 만들면 무엇이 효과였는지 알 수 없다. 가장 단순한 버전으로 시작해 폐루프 실험에서 문제가 드러나는 곳만 바꾸는 것이 좋다. 예를 들어 지연 때문에 출렁이면 모델에 지연을 넣고, 좁은 틈에서 실패하면 장애물 제약을 고친다.</a:t>
             </a:r>
           </a:p>
         </p:txBody>
@@ -959,7 +959,7 @@
           <a:lstStyle/>
           <a:p>
             <a:r>
-              <a:t>둘째 장은 세운 문제를 제어 주기 안에 푸는 법이다. 순차 이차 계획법(SQP)의 원리, 주기마다 한 걸음만 가는 실시간 반복(RTI), 대표 솔버, 그리고 국소해와 초기값 문제를 본다.</a:t>
+              <a:t>둘째 장은 세운 문제를 제어 주기 안에 푸는 법이다. 순차 이차 계획법(SQP)의 원리, 주기마다 한 스텝만 가는 실시간 반복(RTI), 대표 솔버, 그리고 국소해와 초기값 문제를 다룬다.</a:t>
             </a:r>
           </a:p>
         </p:txBody>
@@ -1029,7 +1029,7 @@
           <a:lstStyle/>
           <a:p>
             <a:r>
-              <a:t>SQP는 뉴턴법을 제약 최적화로 넓힌 것이다. 지금의 추정 해에서 모델과 제약을 선형화하고 비용을 이차로 근사하면 QP가 된다. 그 QP의 해만큼 추정 해를 옮기고 다시 반복한다. MPC의 QP는 특별한 구조를 가진다. 시간 단계마다 이웃 단계와만 묶여 있어서, 이 띠 구조를 쓰는 솔버는 지평 길이에 선형인 시간으로 푼다. 비용이 최소제곱이면 Gauss-Newton 근사로 Hessian을 2차 미분 없이 얻는다.</a:t>
+              <a:t>SQP는 뉴턴법을 제약 최적화로 넓힌 것이다. 지금의 추정 해에서 모델과 제약을 선형화하고 비용을 이차로 근사하면 QP가 된다. 그 QP의 해만큼 추정 해를 옮기고 다시 반복한다. MPC의 QP는 특별한 구조를 가진다. 시간 단계마다 이웃 단계와만 연결되어 있어서, 이 banded 구조를 쓰는 솔버는 horizon 길이에 선형인 시간으로 푼다. 비용이 최소제곱이면 Gauss-Newton 근사로 Hessian을 2차 미분 없이 얻는다.</a:t>
             </a:r>
           </a:p>
         </p:txBody>
@@ -1099,7 +1099,7 @@
           <a:lstStyle/>
           <a:p>
             <a:r>
-              <a:t>매 주기 SQP를 끝까지 수렴시키면 시간이 모자란다. RTI는 이 문제를 두 가지 관찰로 푼다. 첫째, 주기가 짧으면 이웃한 두 주기의 문제는 거의 같으므로, 이전 해를 한 칸 밀어 시작하면 한 걸음만으로도 충분히 가깝다. 둘째, 선형화와 행렬 준비는 측정과 무관하므로 측정이 오기 전에 해 두고, 측정이 오면 QP 하나만 푼다. 이렇게 하면 측정에서 명령까지의 지연이 크게 준다. 다만 해가 크게 바뀌는 순간에는 반복을 늘려야 한다.</a:t>
+              <a:t>매 주기 SQP를 끝까지 수렴시키면 시간이 모자란다. RTI는 이 문제를 두 가지 관찰로 푼다. 첫째, 주기가 짧으면 이웃한 두 주기의 문제는 거의 같으므로, 이전 해를 한 스텝 밀어 시작하면 한 스텝만으로도 충분히 가깝다. 둘째, 선형화와 행렬 준비는 측정과 무관하므로 측정이 오기 전에 해 두고, 측정이 오면 QP 하나만 푼다. 이렇게 하면 측정에서 명령까지의 지연이 크게 준다. 다만 해가 크게 바뀌는 순간에는 반복을 늘려야 한다.</a:t>
             </a:r>
           </a:p>
         </p:txBody>
@@ -1169,7 +1169,7 @@
           <a:lstStyle/>
           <a:p>
             <a:r>
-              <a:t>MPC를 만들 때 쓰는 도구는 층이 다르다. CasADi는 모델과 비용을 기호로 적고 미분을 자동으로 만드는 모델링 도구다. IPOPT는 일반 비선형 문제를 견고하게 풀지만 실시간 MPC에는 무겁다. acados는 MPC 전용으로, 적분기와 그 민감도, SQP-RTI, 구조를 쓰는 QP 풀이기를 묶어 C 코드로 생성한다. QP 풀이기는 문제의 크기와 따뜻한 시작 여부에 따라 고른다. 파라미터로 바뀌는 값(참조, 장애물 접평면)은 코드 재생성 없이 매 주기 넘길 수 있다.</a:t>
+              <a:t>MPC를 만들 때 쓰는 도구는 층이 다르다. CasADi는 모델과 비용을 기호로 적고 미분을 자동으로 만드는 모델링 도구다. IPOPT는 일반 비선형 문제를 견고하게 풀지만 실시간 MPC에는 무겁다. acados는 MPC 전용으로, 적분기와 그 민감도, SQP-RTI, 구조를 쓰는 QP 솔버를 합쳐 C 코드로 생성한다. QP 솔버는 문제의 크기와 warm start 여부에 따라 고른다. 파라미터로 바뀌는 값(참조, 장애물 접평면)은 코드 재생성 없이 매 주기 넘길 수 있다.</a:t>
             </a:r>
           </a:p>
         </p:txBody>
@@ -1239,7 +1239,7 @@
           <a:lstStyle/>
           <a:p>
             <a:r>
-              <a:t>기울기 기반 최적화는 시작점 근처의 국소해를 찾는다. 장애물 왼쪽으로 갈지 오른쪽으로 갈지 같은 위상 선택은 기울기가 할 수 없는 일이다. 그래서 MPC의 초기값을 무엇으로 주느냐가 결과를 크게 바꾼다. 가장 흔한 방법은 이전 주기의 해를 한 칸 밀어 쓰는 것이지만, 새 장애물이 나타나면 낡은 위상에 갇힌다. 최근 연구는 학습한 Planner나 RL 정책이 초기값을 주고 MPC가 제약을 지키며 다듬는 분업을 많이 쓴다.</a:t>
+              <a:t>gradient 기반 최적화는 시작점 근처의 국소해를 찾는다. 장애물 왼쪽으로 갈지 오른쪽으로 갈지 같은 위상 선택은 gradient가 할 수 없는 일이다. 그래서 MPC의 초기값을 무엇으로 주느냐가 결과를 크게 바꾼다. 가장 흔한 방법은 이전 주기의 해를 한 스텝 밀어 쓰는 것이지만, 새 장애물이 나타나면 이전 위상에 갇힌다. 최근 연구는 학습한 Planner나 RL 정책이 초기값을 주고 MPC가 제약을 지키며 다듬는 분업을 많이 쓴다.</a:t>
             </a:r>
           </a:p>
         </p:txBody>
@@ -1379,7 +1379,7 @@
           <a:lstStyle/>
           <a:p>
             <a:r>
-              <a:t>실시간 MPC에서 가장 중요한 것은 풀이 시간의 최댓값이다. 평균이 빨라도 가끔 주기를 넘기면 그 순간 제어가 빈다. 그래서 반복 수에 상한을 두고, 풀이가 실패하거나 최대 반복에 걸린 횟수를 함께 기록한다. 실패 시 무엇을 낼지(이전 해의 다음 입력, 감속)도 미리 정해 둬야 한다.</a:t>
+              <a:t>실시간 MPC에서 가장 중요한 것은 풀이 시간의 최댓값이다. 평균이 빨라도 가끔 주기를 넘기면 그 순간 제어가 끊긴다. 그래서 반복 수에 상한을 두고, 풀이가 실패하거나 최대 반복에 걸린 횟수를 함께 기록한다. 실패 시 무엇을 낼지(이전 해의 다음 입력, 감속)도 미리 정해 둬야 한다.</a:t>
             </a:r>
           </a:p>
         </p:txBody>
@@ -1449,7 +1449,7 @@
           <a:lstStyle/>
           <a:p>
             <a:r>
-              <a:t>셋째 장은 모델 오차를 다루는 법이다. 명목 모델에 학습 잔차를 더하는 법, 가우시안 과정을 실시간에 쓰기 위한 희소 근사, 그리고 불확실성만큼 제약을 조이는 튜브 MPC와 확률 제약을 본다. 마지막으로 예측 모델을 층으로 쌓는 생각과, 검증용 시뮬레이터의 원칙을 본다.</a:t>
+              <a:t>셋째 장은 모델 오차를 다루는 법이다. 명목 모델에 학습 잔차를 더하는 법, 가우시안 프로세스를 실시간에 쓰기 위한 희소 근사, 그리고 불확실성만큼 제약을 조이는 튜브 MPC와 확률 제약을 다룬다. 마지막으로 예측 모델을 층으로 쌓는 아이디어와, 검증용 시뮬레이터의 원칙을 살펴본다.</a:t>
             </a:r>
           </a:p>
         </p:txBody>
@@ -1519,7 +1519,7 @@
           <a:lstStyle/>
           <a:p>
             <a:r>
-              <a:t>모델 오차를 다루는 가장 실용적인 방법은 명목 모델을 그대로 두고, 남는 오차만 배워 더하는 것이다. 잔차를 학습 모델의 기호식으로 넣으면 미분까지 계산해야 해서 무겁다. 대신 이전 해의 예측 노드에서 잔차를 계산해 상수 파라미터로 넘기면, 풀이기는 그것을 상수로 보고 미분은 명목 모델로만 한다. 이것이 0차 근사이며, 계산은 거의 늘지 않는다. 주의할 점은 학습 잔차가 자료 밖에서 엉뚱한 값을 낼 때다. 최적화는 그 오류를 찾아가 이용한다.</a:t>
+              <a:t>모델 오차를 다루는 가장 실용적인 방법은 명목 모델을 그대로 두고, 남는 오차만 배워 더하는 것이다. 잔차를 학습 모델의 기호식으로 넣으면 미분까지 계산해야 해서 무겁다. 대신 이전 해의 예측 노드에서 잔차를 계산해 상수 파라미터로 넘기면, 솔버는 그것을 상수로 보고 미분은 명목 모델로만 한다. 이것이 0차 근사이며, 계산은 거의 늘지 않는다. 주의할 점은 학습 잔차가 데이터 분포 밖에서 엉뚱한 값을 낼 때다. 최적화는 그 오류를 찾아가 이용한다.</a:t>
             </a:r>
           </a:p>
         </p:txBody>
@@ -1589,7 +1589,7 @@
           <a:lstStyle/>
           <a:p>
             <a:r>
-              <a:t>가우시안 과정을 제어 루프에서 쓰려면 계산이 걸림돌이다. 정확 GP는 자료 수의 세제곱이라 자료가 수천 개면 갱신 한 번이 제어 주기를 넘긴다. 희소 GP는 자료를 소수의 유도점으로 요약해 계산을 크게 줄인다. 무작위 특징 근사는 더 빠르지만, 자료에서 먼 곳에서 prior로 돌아가지 않고 튀는 값을 낼 수 있다. MPC는 그런 값을 이용하므로, 근사를 고를 때는 정확도와 속도뿐 아니라 자료 밖에서의 거동과 불확실성 보정도 함께 재야 한다.</a:t>
+              <a:t>가우시안 프로세스를 제어 루프에서 쓰려면 계산이 걸림돌이다. 정확 GP는 데이터 수의 세제곱이라 데이터가 수천 개면 갱신 한 번이 제어 주기를 넘긴다. 희소 GP는 데이터를 소수의 inducing point로 요약해 계산을 크게 줄인다. random feature 근사는 더 빠르지만, 데이터에서 먼 곳에서 prior로 돌아가지 않고 튀는 값을 낼 수 있다. MPC는 그런 값을 이용하므로, 근사를 고를 때는 정확도와 속도뿐 아니라 데이터 분포 밖에서의 거동과 불확실성 보정도 함께 재야 한다.</a:t>
             </a:r>
           </a:p>
         </p:txBody>
@@ -1659,7 +1659,7 @@
           <a:lstStyle/>
           <a:p>
             <a:r>
-              <a:t>튜브 MPC는 실제 궤적이 명목 궤적 주변의 관(튜브) 안에 머문다는 것을 이용한다. 명목 궤적은 MPC가 계획하고, 실제 상태와의 오차는 보조 되먹임이 줄인다. 외란이 유계라면 오차가 커질 수 있는 최대 폭을 시간마다 계산할 수 있고, 그만큼 명목 궤적의 제약을 조이면 실제 궤적은 원래 제약을 지킨다. 핵심은 조임 폭 ρ_k 하나다. 이 폭을 외란 상한에서 정하면 튜브 MPC, 확률 분포의 분위수에서 정하면 확률 제약이 된다.</a:t>
+              <a:t>튜브 MPC는 실제 궤적이 명목 궤적 주변의 관(튜브) 안에 머문다는 것을 이용한다. 명목 궤적은 MPC가 계획하고, 실제 상태와의 오차는 보조 피드백이 줄인다. 외란이 유계라면 오차가 커질 수 있는 최대 폭을 시간마다 계산할 수 있고, 그만큼 명목 궤적의 제약을 조이면 실제 궤적은 원래 제약을 지킨다. 핵심은 조임 폭 ρ_k 하나다. 이 폭을 외란 상한에서 정하면 튜브 MPC, 확률 분포의 분위수에서 정하면 확률 제약이 된다.</a:t>
             </a:r>
           </a:p>
         </p:txBody>
@@ -1799,7 +1799,7 @@
           <a:lstStyle/>
           <a:p>
             <a:r>
-              <a:t>모델을 한 번에 정교하게 만들 필요는 없다. 기구학 모델에서 시작해, 폐루프 실험에서 문제가 되는 효과를 동역학 층에 식으로 넣고, 그래도 남는 오차를 학습 층이 맡는다. 특히 구동기 지연은 동역학 층에서 간단히 넣을 수 있는데 효과가 크다. 학습 층은 식으로 쓰기 어려운 접촉과 지형 효과를 담는다. 층마다 같은 인터페이스로 묶어 두면 MPC와 표본 기반 MPC가 같은 예측 모델을 공유할 수 있다.</a:t>
+              <a:t>모델을 한 번에 정교하게 만들 필요는 없다. 기구학 모델에서 시작해, 폐루프 실험에서 문제가 되는 효과를 동역학 층에 식으로 넣고, 그래도 남는 오차를 학습 층이 맡는다. 특히 액추에이터 지연은 동역학 층에서 간단히 넣을 수 있는데 효과가 크다. 학습 층은 식으로 쓰기 어려운 접촉과 지형 효과를 담는다. 층마다 같은 인터페이스로 맞춰 두면 MPC와 샘플 기반 MPC가 같은 예측 모델을 공유할 수 있다.</a:t>
             </a:r>
           </a:p>
         </p:txBody>
@@ -2009,7 +2009,7 @@
           <a:lstStyle/>
           <a:p>
             <a:r>
-              <a:t>넷째 장은 최근 MPC 연구의 흐름을 한 장씩 정리한다. 개별 논문보다 무엇을 함께 하고 어느 축에서 갈리는지를 본다.</a:t>
+              <a:t>넷째 장은 최근 MPC 연구의 흐름을 한 장씩 정리한다. 개별 논문보다 무엇을 함께 하고 어느 축에서 갈리는지를 살펴본다.</a:t>
             </a:r>
           </a:p>
         </p:txBody>
@@ -2079,7 +2079,7 @@
           <a:lstStyle/>
           <a:p>
             <a:r>
-              <a:t>네 번째 덱이다. 제어 덱 2장에서 개념으로 본 MPC를 실제로 세우고 푸는 덱이다. 제어 덱의 LQR과 이동 지평, 그리고 잔차와 GP를 알고 있으면 바로 들어갈 수 있다. 최적화 배경은 이 덱 0장에서 정리한다. 여기서 본 제약과 튜브는 다리 로봇 덱의 투영과 안전으로 다시 나오고, 모델 기반 계획은 강화학습 덱의 모델 기반 RL과 비교해 볼 만하다. 일곱 덱 전체의 순서와 10주 계획은 로드맵 덱에 있다.</a:t>
+              <a:t>네 번째 덱이다. 제어 덱 2장에서 개념으로 본 MPC를 실제로 세우고 푸는 덱이다. 제어 덱의 LQR과 receding horizon, 그리고 잔차와 GP를 알고 있으면 바로 들어갈 수 있다. 최적화 배경은 이 덱 0장에서 정리한다. 여기서 본 제약과 튜브는 다리 로봇 덱의 투영과 안전으로 다시 나오고, 모델 기반 계획은 강화학습 덱의 모델 기반 RL과 비교해 볼 만하다. 일곱 덱 전체의 순서와 10주 계획은 로드맵 덱에 있다.</a:t>
             </a:r>
           </a:p>
         </p:txBody>
@@ -2149,7 +2149,7 @@
           <a:lstStyle/>
           <a:p>
             <a:r>
-              <a:t>표의 연구들을 고친 곳으로 묶었다. 초기해 쪽은 학습한 생성 모델이나 RL 정책이 출발점을 주고 OCP가 제약을 지키며 다듬는다. 확산 초기해 연구에서는 OCP 단독 성공률이 10 % 아래였다가 초기해를 받자 80 % 안팎이 됐다. 제약 쪽은 GP 오차나 기록된 외란으로 튜브를 만든다. 모델 쪽은 지형의 기울기를 입력으로 넣거나, 학습 잔차가 물리적으로 말이 안 되는 가속을 내지 않게 벌한다.</a:t>
+              <a:t>표의 연구들을 고친 곳으로 묶었다. 초기해 쪽은 학습한 생성 모델이나 RL 정책이 출발점을 주고 OCP가 제약을 지키며 다듬는다. diffusion 초기해 연구에서는 OCP 단독 성공률이 10 % 아래였다가 초기해를 받자 80 % 안팎이 됐다. 제약 쪽은 GP 오차나 기록된 외란으로 튜브를 만든다. 모델 쪽은 지형의 기울기를 입력으로 넣거나, 학습 잔차가 물리적으로 말이 안 되는 가속을 내지 않게 페널티를 준다.</a:t>
             </a:r>
           </a:p>
         </p:txBody>
@@ -2919,7 +2919,7 @@
           <a:lstStyle/>
           <a:p>
             <a:r>
-              <a:t>OCP를 세운다는 것은 이 여섯 부품을 고르는 일이다. 상태와 입력의 선택이 어떤 제약을 쉽게 걸 수 있는지를 정하고, 모델과 적분기가 예측의 정확도를 정한다. 지평은 MPC가 얼마나 멀리 보는지를, 비용과 제약은 무엇을 원하고 무엇을 금지하는지를 정한다. 종단 비용과 종단 집합은 짧은 지평의 근시안을 메운다. 다음 장에서 하나씩 본다.</a:t>
+              <a:t>OCP를 세운다는 것은 이 여섯 부품을 고르는 일이다. 상태와 입력의 선택이 어떤 제약을 쉽게 걸 수 있는지를 정하고, 모델과 적분기가 예측의 정확도를 정한다. horizon은 MPC가 얼마나 멀리 보는지를, 비용과 제약은 무엇을 원하고 무엇을 금지하는지를 정한다. 종단 비용과 종단 집합은 짧은 horizon의 근시안을 메운다. 다음 장부터 하나씩 다룬다.</a:t>
             </a:r>
           </a:p>
         </p:txBody>
@@ -2989,7 +2989,7 @@
           <a:lstStyle/>
           <a:p>
             <a:r>
-              <a:t>첫째 장은 문제를 세우는 법이다. 모델과 상태 선택, 적분기, 추종 비용, 제약을 어떻게 거는지, 특히 장애물 같은 비볼록 제약을 노드마다 선형화하는 법과, 풀리지 않는 문제를 피하는 soft 제약을 본다.</a:t>
+              <a:t>첫째 장은 문제를 세우는 법이다. 모델과 상태 선택, 적분기, 추종 비용, 제약을 어떻게 거는지, 특히 장애물 같은 비볼록 제약을 노드마다 선형화하는 법과, 풀리지 않는 문제를 피하는 soft 제약을 다룬다.</a:t>
             </a:r>
           </a:p>
         </p:txBody>
@@ -3059,7 +3059,7 @@
           <a:lstStyle/>
           <a:p>
             <a:r>
-              <a:t>모델을 고를 때 가장 먼저 정할 것은 무엇을 상태로, 무엇을 입력으로 두느냐다. 속도를 입력으로 두면 가속 한계를 걸려면 이웃 스텝의 차이를 제약해야 하지만, 속도를 상태로 두고 그 변화율을 입력으로 두면 가속 한계가 단순한 상자 제약이 된다. 바퀴 하나하나의 역기구학처럼 미분이 불연속인 식은 SQP를 망가뜨리므로 넣지 않고, 그 효과를 차체 수준의 보수적 제약이나 학습 잔차로 흡수한다.</a:t>
+              <a:t>모델을 고를 때 가장 먼저 정할 것은 무엇을 상태로, 무엇을 입력으로 두느냐다. 속도를 입력으로 두면 가속 한계를 걸려면 이웃 스텝의 차이를 제약해야 하지만, 속도를 상태로 두고 그 변화율을 입력으로 두면 가속 한계가 단순한 box 제약이 된다. 바퀴 하나하나의 역기구학처럼 미분이 불연속인 식은 SQP를 망가뜨리므로 넣지 않고, 그 효과를 차체 수준의 보수적 제약이나 학습 잔차로 흡수한다.</a:t>
             </a:r>
           </a:p>
         </p:txBody>
@@ -3129,7 +3129,7 @@
           <a:lstStyle/>
           <a:p>
             <a:r>
-              <a:t>OCP의 모델 제약은 적분기로 이산화한 식이다. 적분기의 오차는 예측 오차가 되고, 예측 오차는 제약 위반이 된다. Euler는 싸지만 1차라 간격을 줄여도 오차가 천천히 준다. RK4는 모델을 네 번 평가하지만 4차라 같은 정확도를 훨씬 긴 간격으로 얻는다. 지평 길이가 정해져 있다면 간격을 키워 노드 수를 줄이는 편이 전체 계산에 유리한 경우가 많다. acados 같은 도구는 명시적 RK 적분기와 그 민감도를 자동으로 만들어 준다.</a:t>
+              <a:t>OCP의 모델 제약은 적분기로 이산화한 식이다. 적분기의 오차는 예측 오차가 되고, 예측 오차는 제약 위반이 된다. Euler는 싸지만 1차라 간격을 줄여도 오차가 천천히 준다. RK4는 모델을 네 번 평가하지만 4차라 같은 정확도를 훨씬 긴 간격으로 얻는다. horizon 길이가 정해져 있다면 간격을 키워 노드 수를 줄이는 편이 전체 계산에 유리한 경우가 많다. acados 같은 도구는 explicit RK 적분기와 그 민감도를 자동으로 만들어 준다.</a:t>
             </a:r>
           </a:p>
         </p:txBody>
@@ -7357,7 +7357,7 @@
                 <a:ea typeface="Malgun Gothic"/>
                 <a:cs typeface="Malgun Gothic"/>
               </a:rPr>
-              <a:t>위치는 크게, 옆걸음·회전·가속은 작게. 단위가 다르면 크기를 맞춰 정규화한다.</a:t>
+              <a:t>위치는 크게, 횡방향 이동·회전·가속은 작게. 단위가 다르면 크기를 맞춰 정규화한다.</a:t>
             </a:r>
           </a:p>
         </p:txBody>
@@ -7630,7 +7630,7 @@
                 <a:ea typeface="Malgun Gothic"/>
                 <a:cs typeface="Malgun Gothic"/>
               </a:rPr>
-              <a:t>지평 끝에서 목표 쪽으로 끌어당긴다. 크면 진행이 강하고, 작으면 지평이 짧을 때 멈춘다.</a:t>
+              <a:t>horizon 끝에서 목표 쪽으로 끌어당긴다. 크면 진행이 강하고, 작으면 horizon이 짧을 때 멈춘다.</a:t>
             </a:r>
           </a:p>
         </p:txBody>
@@ -7892,7 +7892,7 @@
                 <a:ea typeface="Malgun Gothic"/>
                 <a:cs typeface="Malgun Gothic"/>
               </a:rPr>
-              <a:t>경로만 있으면 원하는 속도로 시간을 매겨 시간 인덱스 참조로 만든다. 시간 붙은 궤적이면 그대로 쓴다.</a:t>
+              <a:t>경로만 있으면 원하는 속도로 시간을 매겨 시간 인덱스 참조로 만든다. 시간 인덱스가 있는 궤적이면 그대로 쓴다.</a:t>
             </a:r>
           </a:p>
         </p:txBody>
@@ -8813,7 +8813,7 @@
                 <a:ea typeface="Malgun Gothic"/>
                 <a:cs typeface="Malgun Gothic"/>
               </a:rPr>
-              <a:t>L1 벌점은 가중치가 충분히 크면 hard 제약과 같은 해를 주고, 늘 풀린다</a:t>
+              <a:t>L1 페널티는 가중치가 충분히 크면 hard 제약과 같은 해를 주고, 늘 풀린다</a:t>
             </a:r>
           </a:p>
         </p:txBody>
@@ -8997,7 +8997,7 @@
                 <a:ea typeface="Malgun Gothic"/>
                 <a:cs typeface="Malgun Gothic"/>
               </a:rPr>
-              <a:t>(a) L1 벌점은 ρ가 라그랑주 승수(여기서는 2)보다 크면 해가 제약 경계에 정확히 선다. 이차 벌점은 ρ를 아무리 키워도 조금 넘는다 (b) L1 벌점은 경계에서 꺾여 있다</a:t>
+              <a:t>(a) L1 페널티는 ρ가 라그랑주 승수(여기서는 2)보다 크면 해가 제약 경계에 정확히 선다. 이차 페널티는 ρ를 아무리 키워도 조금 넘는다 (b) L1 페널티는 경계에서 꺾여 있다</a:t>
             </a:r>
           </a:p>
         </p:txBody>
@@ -9259,7 +9259,7 @@
                 <a:ea typeface="Malgun Gothic"/>
                 <a:cs typeface="Malgun Gothic"/>
               </a:rPr>
-              <a:t>나쁜 초기해나 외란으로 hard 제약을 만족할 수 없으면 QP가 실패한다. 풀리지 않는 문제는 안전이 아니라 무작위다.</a:t>
+              <a:t>나쁜 초기해나 외란으로 hard 제약을 만족할 수 없으면 QP가 실패한다. 풀리지 않으면 안전한 것이 아니라 출력이 임의의 값이 된다.</a:t>
             </a:r>
           </a:p>
         </p:txBody>
@@ -9521,7 +9521,7 @@
                 <a:ea typeface="Malgun Gothic"/>
                 <a:cs typeface="Malgun Gothic"/>
               </a:rPr>
-              <a:t>안전 제약은 L1 + 큰 ρ(정확한 벌점), 이차 항을 조금 더해 수치를 안정시킨다. 위반량은 따로 기록한다.</a:t>
+              <a:t>안전 제약은 L1 + 큰 ρ(exact penalty), 이차 항을 조금 더해 수치를 안정시킨다. 위반량은 따로 기록한다.</a:t>
             </a:r>
           </a:p>
         </p:txBody>
@@ -9868,7 +9868,7 @@
                           <a:ea typeface="Malgun Gothic"/>
                           <a:cs typeface="Malgun Gothic"/>
                         </a:rPr>
-                        <a:t>짧은 지평의 근시안 보완</a:t>
+                        <a:t>짧은 horizon의 근시안 보완</a:t>
                       </a:r>
                     </a:p>
                   </a:txBody>
@@ -10090,7 +10090,7 @@
                           <a:ea typeface="Malgun Gothic"/>
                           <a:cs typeface="Malgun Gothic"/>
                         </a:rPr>
-                        <a:t>계단이라 기울기 없음</a:t>
+                        <a:t>계단이라 gradient 없음</a:t>
                       </a:r>
                     </a:p>
                   </a:txBody>
@@ -10214,7 +10214,7 @@
                           <a:ea typeface="Malgun Gothic"/>
                           <a:cs typeface="Malgun Gothic"/>
                         </a:rPr>
-                        <a:t>상자 제약</a:t>
+                        <a:t>box 제약</a:t>
                       </a:r>
                     </a:p>
                   </a:txBody>
@@ -10463,9 +10463,9 @@
                 <a:tableStyleId>{5C22544A-7EE6-4342-B048-85BDC9FD1C3A}</a:tableStyleId>
               </a:tblPr>
               <a:tblGrid>
-                <a:gridCol w="1148556"/>
-                <a:gridCol w="4067076"/>
-                <a:gridCol w="5553968"/>
+                <a:gridCol w="1323380"/>
+                <a:gridCol w="3993158"/>
+                <a:gridCol w="5453062"/>
               </a:tblGrid>
               <a:tr h="300067">
                 <a:tc>
@@ -10556,7 +10556,7 @@
                           <a:ea typeface="Malgun Gothic"/>
                           <a:cs typeface="Malgun Gothic"/>
                         </a:rPr>
-                        <a:t>지평</a:t>
+                        <a:t>horizon</a:t>
                       </a:r>
                     </a:p>
                   </a:txBody>
@@ -10876,7 +10876,7 @@
                           <a:ea typeface="Malgun Gothic"/>
                           <a:cs typeface="Malgun Gothic"/>
                         </a:rPr>
-                        <a:t>hard: 보장, 불능 위험</a:t>
+                        <a:t>hard: 보장, infeasible 위험</a:t>
                       </a:r>
                     </a:p>
                   </a:txBody>
@@ -11119,7 +11119,7 @@
                 <a:ea typeface="Malgun Gothic"/>
                 <a:cs typeface="Malgun Gothic"/>
               </a:rPr>
-              <a:t>한 걸음씩 꾸준히 고친다</a:t>
+              <a:t>한 스텝씩 꾸준히 고친다</a:t>
             </a:r>
           </a:p>
         </p:txBody>
@@ -11160,7 +11160,7 @@
                 <a:ea typeface="Malgun Gothic"/>
                 <a:cs typeface="Malgun Gothic"/>
               </a:rPr>
-              <a:t>SQP는 비선형 문제를 QP의 연속으로, RTI는 그 한 걸음을 주기마다 한 번.</a:t>
+              <a:t>SQP는 비선형 문제를 QP의 연속으로, RTI는 그 한 스텝을 주기마다 한 번.</a:t>
             </a:r>
           </a:p>
         </p:txBody>
@@ -12699,7 +12699,7 @@
                 <a:ea typeface="Malgun Gothic"/>
                 <a:cs typeface="Malgun Gothic"/>
               </a:rPr>
-              <a:t>최소제곱 비용이면 2차 미분 없이 Hessian을 근사. 늘 양반정치라 안정적.</a:t>
+              <a:t>최소제곱 비용이면 2차 미분 없이 Hessian을 근사. 늘 PSD(positive semidefinite)라 안정적.</a:t>
             </a:r>
           </a:p>
         </p:txBody>
@@ -12961,7 +12961,7 @@
                 <a:ea typeface="Malgun Gothic"/>
                 <a:cs typeface="Malgun Gothic"/>
               </a:rPr>
-              <a:t>시간 단계마다 이웃만 묶이는 띠 구조. 리카티식 풀이로 지평에 선형인 계산.</a:t>
+              <a:t>시간 단계마다 이웃 단계만 연결되는 banded 구조. Riccati식 풀이로 horizon 길이에 선형인 계산.</a:t>
             </a:r>
           </a:p>
         </p:txBody>
@@ -13223,7 +13223,7 @@
                 <a:ea typeface="Malgun Gothic"/>
                 <a:cs typeface="Malgun Gothic"/>
               </a:rPr>
-              <a:t>해 근처에서 빠르다. 멀면 선 탐색·신뢰 영역이 필요하다.</a:t>
+              <a:t>해 근처에서 빠르다. 멀면 line search·trust region이 필요하다.</a:t>
             </a:r>
           </a:p>
         </p:txBody>
@@ -13331,7 +13331,7 @@
                 <a:ea typeface="Malgun Gothic"/>
                 <a:cs typeface="Malgun Gothic"/>
               </a:rPr>
-              <a:t>RTI는 주기마다 SQP 한 걸음만 가고, 준비 단계를 측정 전에 미리 한다</a:t>
+              <a:t>RTI는 주기마다 SQP 한 스텝만 가고, 준비 단계를 측정 전에 미리 한다</a:t>
             </a:r>
           </a:p>
         </p:txBody>
@@ -13560,7 +13560,7 @@
                 <a:ea typeface="Malgun Gothic"/>
                 <a:cs typeface="Malgun Gothic"/>
               </a:rPr>
-              <a:t>측정이 오기 전: 이전 해를 한 칸 밀고, 선형화와 QP 행렬 준비</a:t>
+              <a:t>측정이 오기 전: 이전 해를 한 스텝 밀고, 선형화와 QP 행렬 준비</a:t>
             </a:r>
           </a:p>
         </p:txBody>
@@ -14370,7 +14370,7 @@
                 <a:ea typeface="Malgun Gothic"/>
                 <a:cs typeface="Malgun Gothic"/>
               </a:rPr>
-              <a:t>문제가 조금만 바뀌므로 한 걸음씩 수렴을 따라간다</a:t>
+              <a:t>문제가 조금만 바뀌므로 한 스텝씩 수렴을 따라간다</a:t>
             </a:r>
           </a:p>
         </p:txBody>
@@ -14894,7 +14894,7 @@
                 <a:ea typeface="Malgun Gothic"/>
                 <a:cs typeface="Malgun Gothic"/>
               </a:rPr>
-              <a:t>해가 크게 움직이면(새 장애물, 큰 외란) 한 걸음으로 부족하다. 리셋 직후·제약이 해에 매달려 있으면 반복을 늘린다.</a:t>
+              <a:t>해가 크게 움직이면(새 장애물, 큰 외란) 한 스텝으로 부족하다. 리셋 직후·제약이 지금 해에 의존하면 반복을 늘린다.</a:t>
             </a:r>
           </a:p>
         </p:txBody>
@@ -15156,7 +15156,7 @@
                 <a:ea typeface="Malgun Gothic"/>
                 <a:cs typeface="Malgun Gothic"/>
               </a:rPr>
-              <a:t>제약이 지금 해에 의존해 다시 계산되는 경우(노드별 접평면), 한 주기에 RTI를 몇 번 반복하고 soft 제약의 벌점을 충분히 크게 해야 해와 제약이 만난다. 둘 중 하나만 바꾸면 부족한 경우가 많다.</a:t>
+              <a:t>제약이 지금 해에 의존해 다시 계산되는 경우(노드별 접평면), 한 주기에 RTI를 몇 번 반복하고 soft 제약의 페널티를 충분히 크게 해야 해와 제약이 만난다. 둘 중 하나만 바꾸면 부족한 경우가 많다.</a:t>
             </a:r>
           </a:p>
         </p:txBody>
@@ -15361,7 +15361,7 @@
                 <a:ea typeface="Malgun Gothic"/>
                 <a:cs typeface="Malgun Gothic"/>
               </a:rPr>
-              <a:t>모델링 도구, NLP 풀이기, QP 풀이기를 구별해 고른다</a:t>
+              <a:t>모델링 도구, NLP 솔버, QP 솔버를 구별해 고른다</a:t>
             </a:r>
           </a:p>
         </p:txBody>
@@ -15376,7 +15376,7 @@
         </p:nvGraphicFramePr>
         <p:xfrm>
           <a:off x="711200" y="1361678"/>
-          <a:ext cx="10769600" cy="1998423"/>
+          <a:ext cx="10769599" cy="1998423"/>
         </p:xfrm>
         <a:graphic>
           <a:graphicData uri="http://schemas.openxmlformats.org/drawingml/2006/table">
@@ -15385,10 +15385,10 @@
                 <a:tableStyleId>{5C22544A-7EE6-4342-B048-85BDC9FD1C3A}</a:tableStyleId>
               </a:tblPr>
               <a:tblGrid>
-                <a:gridCol w="1266527"/>
-                <a:gridCol w="3533378"/>
-                <a:gridCol w="2400102"/>
-                <a:gridCol w="3569593"/>
+                <a:gridCol w="1243905"/>
+                <a:gridCol w="3470275"/>
+                <a:gridCol w="2549624"/>
+                <a:gridCol w="3505795"/>
               </a:tblGrid>
               <a:tr h="292814">
                 <a:tc>
@@ -15551,7 +15551,7 @@
                           <a:ea typeface="Malgun Gothic"/>
                           <a:cs typeface="Malgun Gothic"/>
                         </a:rPr>
-                        <a:t>유연, 여러 풀이기 연결</a:t>
+                        <a:t>유연, 여러 솔버 연결</a:t>
                       </a:r>
                     </a:p>
                   </a:txBody>
@@ -15625,7 +15625,7 @@
                           <a:ea typeface="Malgun Gothic"/>
                           <a:cs typeface="Malgun Gothic"/>
                         </a:rPr>
-                        <a:t>내점법 NLP 풀이기</a:t>
+                        <a:t>내점법 NLP 솔버</a:t>
                       </a:r>
                     </a:p>
                   </a:txBody>
@@ -15845,7 +15845,7 @@
                           <a:ea typeface="Malgun Gothic"/>
                           <a:cs typeface="Malgun Gothic"/>
                         </a:rPr>
-                        <a:t>띠 구조 활용, 빠름</a:t>
+                        <a:t>banded 구조 활용, 빠름</a:t>
                       </a:r>
                     </a:p>
                   </a:txBody>
@@ -15919,7 +15919,7 @@
                           <a:ea typeface="Malgun Gothic"/>
                           <a:cs typeface="Malgun Gothic"/>
                         </a:rPr>
-                        <a:t>활성 집합 QP</a:t>
+                        <a:t>active-set QP</a:t>
                       </a:r>
                     </a:p>
                   </a:txBody>
@@ -15943,7 +15943,7 @@
                           <a:ea typeface="Malgun Gothic"/>
                           <a:cs typeface="Malgun Gothic"/>
                         </a:rPr>
-                        <a:t>따뜻한 시작에 강함</a:t>
+                        <a:t>warm start에 강함</a:t>
                       </a:r>
                     </a:p>
                   </a:txBody>
@@ -16158,7 +16158,7 @@
                 <a:ea typeface="Malgun Gothic"/>
                 <a:cs typeface="Malgun Gothic"/>
               </a:rPr>
-              <a:t> CasADi로 모델을 쓰고, acados가 RK 적분기·SQP-RTI·HPIPM을 묶은 C 코드를 생성한다.</a:t>
+              <a:t> CasADi로 모델을 쓰고, acados가 RK 적분기·SQP-RTI·HPIPM을 합친 C 코드를 생성한다.</a:t>
             </a:r>
           </a:p>
         </p:txBody>
@@ -16364,7 +16364,7 @@
                 <a:ea typeface="Malgun Gothic"/>
                 <a:cs typeface="Malgun Gothic"/>
               </a:rPr>
-              <a:t>장애물을 뚫는 곧은 초기 경로(반복 0)를 기울기로 고치면, 작은 비대칭이 위·아래 중 한쪽을 정한다. 그 쪽이 좋은지는 기울기가 모른다</a:t>
+              <a:t>장애물을 뚫는 곧은 초기 경로(반복 0)를 gradient로 고치면, 작은 비대칭이 위·아래 중 한쪽을 정한다. 그 쪽이 좋은지는 gradient가 모른다</a:t>
             </a:r>
           </a:p>
         </p:txBody>
@@ -16626,7 +16626,7 @@
                 <a:ea typeface="Malgun Gothic"/>
                 <a:cs typeface="Malgun Gothic"/>
               </a:rPr>
-              <a:t>가장 흔한 따뜻한 시작. 상황이 크게 바뀌면 낡은 위상에 갇힌다.</a:t>
+              <a:t>가장 흔한 warm start. 상황이 크게 바뀌면 이전 위상에 갇힌다.</a:t>
             </a:r>
           </a:p>
         </p:txBody>
@@ -16847,7 +16847,7 @@
                 <a:ea typeface="Malgun Gothic"/>
                 <a:cs typeface="Malgun Gothic"/>
               </a:rPr>
-              <a:t>위층 경로로</a:t>
+              <a:t>상위 경로로</a:t>
             </a:r>
           </a:p>
         </p:txBody>
@@ -16888,7 +16888,7 @@
                 <a:ea typeface="Malgun Gothic"/>
                 <a:cs typeface="Malgun Gothic"/>
               </a:rPr>
-              <a:t>전역 계획기나 학습 Planner의 궤적을 초기값으로. 위상을 위에서 정한다.</a:t>
+              <a:t>전역 Planner나 학습 Planner의 궤적을 초기값으로. 위상을 상위 계층이 정한다.</a:t>
             </a:r>
           </a:p>
         </p:txBody>
@@ -18465,7 +18465,7 @@
                 <a:ea typeface="Malgun Gothic"/>
                 <a:cs typeface="Malgun Gothic"/>
               </a:rPr>
-              <a:t> 평균이 아니라 최악의 풀이 시간을 재고, 실패(불능·최대 반복)를 기록한다.</a:t>
+              <a:t> 평균이 아니라 최악의 풀이 시간을 재고, 실패(infeasible·최대 반복)를 기록한다.</a:t>
             </a:r>
           </a:p>
         </p:txBody>
@@ -18912,7 +18912,7 @@
                 <a:ea typeface="Malgun Gothic"/>
                 <a:cs typeface="Malgun Gothic"/>
               </a:rPr>
-              <a:t>풀이기는 </a:t>
+              <a:t>솔버는 </a:t>
             </a:r>
             <a:r>
               <a:rPr sz="1250" b="0" i="1">
@@ -19129,7 +19129,7 @@
                 <a:ea typeface="Malgun Gothic"/>
                 <a:cs typeface="Malgun Gothic"/>
               </a:rPr>
-              <a:t>잔차 표본 14개로 맞춘 GP와 선형 회귀. 자료 밖에서 σ가 커진다</a:t>
+              <a:t>잔차 샘플 14개로 피팅한 GP와 선형 회귀. 데이터 분포 밖에서 σ가 커진다</a:t>
             </a:r>
           </a:p>
         </p:txBody>
@@ -19391,7 +19391,7 @@
                 <a:ea typeface="Malgun Gothic"/>
                 <a:cs typeface="Malgun Gothic"/>
               </a:rPr>
-              <a:t>명목 모델의 구조와 풀이기를 그대로 두고 예측만 고친다.</a:t>
+              <a:t>명목 모델의 구조와 솔버를 그대로 두고 예측만 고친다.</a:t>
             </a:r>
           </a:p>
         </p:txBody>
@@ -19653,7 +19653,7 @@
                 <a:ea typeface="Malgun Gothic"/>
                 <a:cs typeface="Malgun Gothic"/>
               </a:rPr>
-              <a:t>예측 분산에 관측 잡음을 빼먹으면 과신한다. 자료 밖에서 학습 잔차가 튀면 MPC가 그것을 이용한다.</a:t>
+              <a:t>예측 분산에 관측 잡음을 빼먹으면 과신한다. 데이터 분포 밖에서 학습 잔차가 튀면 MPC가 그것을 이용한다.</a:t>
             </a:r>
           </a:p>
         </p:txBody>
@@ -19831,7 +19831,7 @@
         <p:spPr>
           <a:xfrm>
             <a:off x="711200" y="781050"/>
-            <a:ext cx="11118088" cy="554335"/>
+            <a:ext cx="11118088" cy="1057870"/>
           </a:xfrm>
           <a:prstGeom prst="rect">
             <a:avLst/>
@@ -19858,7 +19858,7 @@
                 <a:ea typeface="Malgun Gothic"/>
                 <a:cs typeface="Malgun Gothic"/>
               </a:rPr>
-              <a:t>정확 GP는 자료가 늘면 주기를 넘기고, 유도점으로 요약하면 실시간에 든다</a:t>
+              <a:t>정확 GP는 데이터가 늘면 주기를 넘기고, inducing point로 요약하면 실시간에 든다</a:t>
             </a:r>
           </a:p>
         </p:txBody>
@@ -19871,7 +19871,7 @@
         </p:nvSpPr>
         <p:spPr>
           <a:xfrm>
-            <a:off x="711200" y="1361678"/>
+            <a:off x="711200" y="1764506"/>
             <a:ext cx="10769600" cy="2286000"/>
           </a:xfrm>
           <a:prstGeom prst="roundRect">
@@ -19912,7 +19912,7 @@
         </p:blipFill>
         <p:spPr>
           <a:xfrm>
-            <a:off x="2931986" y="1361678"/>
+            <a:off x="2931986" y="1764506"/>
             <a:ext cx="6328028" cy="2286000"/>
           </a:xfrm>
           <a:prstGeom prst="rect">
@@ -19928,7 +19928,7 @@
         </p:nvSpPr>
         <p:spPr>
           <a:xfrm>
-            <a:off x="711200" y="3711178"/>
+            <a:off x="711200" y="4114006"/>
             <a:ext cx="11118088" cy="273050"/>
           </a:xfrm>
           <a:prstGeom prst="rect">
@@ -19956,7 +19956,7 @@
                 <a:ea typeface="Malgun Gothic"/>
                 <a:cs typeface="Malgun Gothic"/>
               </a:rPr>
-              <a:t>자료 300점을 유도점 6개와 16개로 요약한 희소 GP(DTC). 유도점이 적으면 굴곡을 놓치고, 자료 밖에서는 prior로 돌아간다</a:t>
+              <a:t>데이터 300점을 inducing point 6개와 16개로 요약한 희소 GP(DTC). inducing point가 적으면 굴곡을 놓치고, 데이터 분포 밖에서는 prior로 돌아간다</a:t>
             </a:r>
           </a:p>
         </p:txBody>
@@ -19970,8 +19970,8 @@
           <p:nvPr/>
         </p:nvGraphicFramePr>
         <p:xfrm>
-          <a:off x="711200" y="4066778"/>
-          <a:ext cx="10769600" cy="1114921"/>
+          <a:off x="711200" y="4469606"/>
+          <a:ext cx="10769601" cy="1114921"/>
         </p:xfrm>
         <a:graphic>
           <a:graphicData uri="http://schemas.openxmlformats.org/drawingml/2006/table">
@@ -19980,11 +19980,11 @@
                 <a:tableStyleId>{5C22544A-7EE6-4342-B048-85BDC9FD1C3A}</a:tableStyleId>
               </a:tblPr>
               <a:tblGrid>
-                <a:gridCol w="2842220"/>
-                <a:gridCol w="1180009"/>
-                <a:gridCol w="1283990"/>
-                <a:gridCol w="2901454"/>
-                <a:gridCol w="2561927"/>
+                <a:gridCol w="3356769"/>
+                <a:gridCol w="1008261"/>
+                <a:gridCol w="1097062"/>
+                <a:gridCol w="2660055"/>
+                <a:gridCol w="2647454"/>
               </a:tblGrid>
               <a:tr h="285477">
                 <a:tc>
@@ -20245,7 +20245,7 @@
                           <a:ea typeface="Malgun Gothic"/>
                           <a:cs typeface="Malgun Gothic"/>
                         </a:rPr>
-                        <a:t>희소 GP(SGPR, 유도점 m)</a:t>
+                        <a:t>희소 GP(SGPR, inducing point m개)</a:t>
                       </a:r>
                     </a:p>
                   </a:txBody>
@@ -20317,7 +20317,7 @@
                           <a:ea typeface="Malgun Gothic"/>
                           <a:cs typeface="Malgun Gothic"/>
                         </a:rPr>
-                        <a:t>자료를 다 쓰고 빠름, 보수적</a:t>
+                        <a:t>데이터를 다 쓰고 빠름, 보수적</a:t>
                       </a:r>
                     </a:p>
                   </a:txBody>
@@ -20367,7 +20367,7 @@
                           <a:ea typeface="Malgun Gothic"/>
                           <a:cs typeface="Malgun Gothic"/>
                         </a:rPr>
-                        <a:t>무작위 특징(RFF)</a:t>
+                        <a:t>random feature(RFF)</a:t>
                       </a:r>
                     </a:p>
                   </a:txBody>
@@ -20463,7 +20463,7 @@
                           <a:ea typeface="Malgun Gothic"/>
                           <a:cs typeface="Malgun Gothic"/>
                         </a:rPr>
-                        <a:t>자료 밖에서 튈 수 있다</a:t>
+                        <a:t>데이터 분포 밖에서 튈 수 있다</a:t>
                       </a:r>
                     </a:p>
                   </a:txBody>
@@ -20679,7 +20679,7 @@
                 <a:ea typeface="Malgun Gothic"/>
                 <a:cs typeface="Malgun Gothic"/>
               </a:rPr>
-              <a:t>유계 외란 |w| ≤ 0.03과 보조 되먹임(오차 수축률 0.85) 아래, 오차가 머무는 튜브의 폭 ρ_k만큼 명목 궤적의 제약을 조이면 실제 궤적은 원래 제약을 지킨다</a:t>
+              <a:t>유계 외란 |w| ≤ 0.03과 보조 피드백(오차 수축률 0.85) 아래, 오차가 머무는 튜브의 폭 ρ_k만큼 명목 궤적의 제약을 조이면 실제 궤적은 원래 제약을 지킨다</a:t>
             </a:r>
           </a:p>
         </p:txBody>
@@ -21745,7 +21745,7 @@
                 <a:ea typeface="Malgun Gothic"/>
                 <a:cs typeface="Malgun Gothic"/>
               </a:rPr>
-              <a:t>GP 잔차의 분산을 지평을 따라 전파한다(선형화·무향 변환).</a:t>
+              <a:t>GP 잔차의 분산을 horizon을 따라 전파한다(선형화·unscented 변환).</a:t>
             </a:r>
           </a:p>
         </p:txBody>
@@ -22007,7 +22007,7 @@
                 <a:ea typeface="Malgun Gothic"/>
                 <a:cs typeface="Malgun Gothic"/>
               </a:rPr>
-              <a:t>노드별 위반 확률. 지평 전체 보장에는 노드 수만큼 나눠야 한다.</a:t>
+              <a:t>노드별 위반 확률. horizon 전체 보장에는 노드 수만큼 나눠야 한다.</a:t>
             </a:r>
           </a:p>
         </p:txBody>
@@ -22170,7 +22170,7 @@
         <p:spPr>
           <a:xfrm>
             <a:off x="8208367" y="2379762"/>
-            <a:ext cx="660995" cy="241300"/>
+            <a:ext cx="887512" cy="241300"/>
           </a:xfrm>
           <a:prstGeom prst="roundRect">
             <a:avLst>
@@ -22201,7 +22201,7 @@
         <p:spPr>
           <a:xfrm>
             <a:off x="8297267" y="2405162"/>
-            <a:ext cx="523091" cy="288925"/>
+            <a:ext cx="756403" cy="288925"/>
           </a:xfrm>
           <a:prstGeom prst="rect">
             <a:avLst/>
@@ -22228,7 +22228,7 @@
                 <a:ea typeface="Malgun Gothic"/>
                 <a:cs typeface="Malgun Gothic"/>
               </a:rPr>
-              <a:t>다리 놓기</a:t>
+              <a:t>튜브와의 연결</a:t>
             </a:r>
           </a:p>
         </p:txBody>
@@ -22293,9 +22293,9 @@
                 <a:tableStyleId>{5C22544A-7EE6-4342-B048-85BDC9FD1C3A}</a:tableStyleId>
               </a:tblPr>
               <a:tblGrid>
-                <a:gridCol w="1976438"/>
-                <a:gridCol w="3489027"/>
-                <a:gridCol w="5304135"/>
+                <a:gridCol w="1790005"/>
+                <a:gridCol w="3159820"/>
+                <a:gridCol w="5819775"/>
               </a:tblGrid>
               <a:tr h="285477">
                 <a:tc>
@@ -22644,7 +22644,7 @@
                           <a:ea typeface="Malgun Gothic"/>
                           <a:cs typeface="Malgun Gothic"/>
                         </a:rPr>
-                        <a:t>분산이 과신·과소신(보정 문제)</a:t>
+                        <a:t>분산이 실제보다 작거나 큼(보정 문제)</a:t>
                       </a:r>
                     </a:p>
                   </a:txBody>
@@ -22786,10 +22786,10 @@
                 <a:tableStyleId>{5C22544A-7EE6-4342-B048-85BDC9FD1C3A}</a:tableStyleId>
               </a:tblPr>
               <a:tblGrid>
-                <a:gridCol w="1010047"/>
-                <a:gridCol w="4117975"/>
-                <a:gridCol w="2702024"/>
-                <a:gridCol w="2939554"/>
+                <a:gridCol w="988219"/>
+                <a:gridCol w="4029273"/>
+                <a:gridCol w="2875955"/>
+                <a:gridCol w="2876153"/>
               </a:tblGrid>
               <a:tr h="292814">
                 <a:tc>
@@ -22928,7 +22928,7 @@
                           <a:ea typeface="Malgun Gothic"/>
                           <a:cs typeface="Malgun Gothic"/>
                         </a:rPr>
-                        <a:t>속도 적분 + 상자·가속 한계</a:t>
+                        <a:t>속도 적분 + box·가속 한계</a:t>
                       </a:r>
                     </a:p>
                   </a:txBody>
@@ -23026,7 +23026,7 @@
                           <a:ea typeface="Malgun Gothic"/>
                           <a:cs typeface="Malgun Gothic"/>
                         </a:rPr>
-                        <a:t>구동기 지연, 슬립, 질량·관성</a:t>
+                        <a:t>액추에이터 지연, 슬립, 질량·관성</a:t>
                       </a:r>
                     </a:p>
                   </a:txBody>
@@ -23050,7 +23050,7 @@
                           <a:ea typeface="Malgun Gothic"/>
                           <a:cs typeface="Malgun Gothic"/>
                         </a:rPr>
-                        <a:t>물리적 의미, 적은 자료</a:t>
+                        <a:t>물리적 의미, 적은 데이터</a:t>
                       </a:r>
                     </a:p>
                   </a:txBody>
@@ -23172,7 +23172,7 @@
                           <a:ea typeface="Malgun Gothic"/>
                           <a:cs typeface="Malgun Gothic"/>
                         </a:rPr>
-                        <a:t>자료 밖, 이용당함</a:t>
+                        <a:t>데이터 분포 밖, 이용당함</a:t>
                       </a:r>
                     </a:p>
                   </a:txBody>
@@ -23264,7 +23264,7 @@
                 <a:ea typeface="Malgun Gothic"/>
                 <a:cs typeface="Malgun Gothic"/>
               </a:rPr>
-              <a:t>선례: 로봇 몸을 지형 위에서 굴린 forward 모델 + 표본 MPC는 6초 궤적 1,500개를 3 ms에 굴린다(Kim 외, RSS 2022). 액추에이터 망(Hwangbo 외, 2019)은 구동기 동역학을 학습한다.</a:t>
+              <a:t>선례: 로봇 몸체를 지형 위에서 시뮬레이션하는 forward 모델 + 샘플 기반 MPC는 6초 궤적 1,500개를 3 ms에 rollout한다(Kim 외, RSS 2022). actuator network(Hwangbo 외, 2019)은 액추에이터 동역학을 학습한다.</a:t>
             </a:r>
           </a:p>
         </p:txBody>
@@ -23362,7 +23362,7 @@
                 <a:ea typeface="Malgun Gothic"/>
                 <a:cs typeface="Malgun Gothic"/>
               </a:rPr>
-              <a:t>FDM 기반 안전 내비게이션: 표본기 → forward 모델 예측 → 보상 가중 평균 — arXiv:2204.08647</a:t>
+              <a:t>FDM 기반 안전 내비게이션: 샘플러 → forward 모델 예측 → 보상 가중 평균 — arXiv:2204.08647</a:t>
             </a:r>
           </a:p>
         </p:txBody>
@@ -24197,9 +24197,9 @@
                 <a:tableStyleId>{5C22544A-7EE6-4342-B048-85BDC9FD1C3A}</a:tableStyleId>
               </a:tblPr>
               <a:tblGrid>
-                <a:gridCol w="681930"/>
-                <a:gridCol w="5645845"/>
-                <a:gridCol w="4441825"/>
+                <a:gridCol w="663674"/>
+                <a:gridCol w="5495131"/>
+                <a:gridCol w="4610795"/>
               </a:tblGrid>
               <a:tr h="285477">
                 <a:tc>
@@ -24412,7 +24412,7 @@
                           <a:ea typeface="Malgun Gothic"/>
                           <a:cs typeface="Malgun Gothic"/>
                         </a:rPr>
-                        <a:t>접촉·마찰, 잔차 자료 대량 수집</a:t>
+                        <a:t>접촉·마찰, 잔차 데이터 대량 수집</a:t>
                       </a:r>
                     </a:p>
                   </a:txBody>
@@ -24693,7 +24693,7 @@
         </p:nvGraphicFramePr>
         <p:xfrm>
           <a:off x="711200" y="1361678"/>
-          <a:ext cx="10769600" cy="1713705"/>
+          <a:ext cx="10769599" cy="1713705"/>
         </p:xfrm>
         <a:graphic>
           <a:graphicData uri="http://schemas.openxmlformats.org/drawingml/2006/table">
@@ -24702,9 +24702,9 @@
                 <a:tableStyleId>{5C22544A-7EE6-4342-B048-85BDC9FD1C3A}</a:tableStyleId>
               </a:tblPr>
               <a:tblGrid>
-                <a:gridCol w="3445470"/>
-                <a:gridCol w="2716808"/>
-                <a:gridCol w="4607322"/>
+                <a:gridCol w="3091160"/>
+                <a:gridCol w="2697162"/>
+                <a:gridCol w="4981277"/>
               </a:tblGrid>
               <a:tr h="292814">
                 <a:tc>
@@ -24819,7 +24819,7 @@
                           <a:ea typeface="Malgun Gothic"/>
                           <a:cs typeface="Malgun Gothic"/>
                         </a:rPr>
-                        <a:t>적은 자료, 큰 효과</a:t>
+                        <a:t>적은 데이터, 큰 효과</a:t>
                       </a:r>
                     </a:p>
                   </a:txBody>
@@ -24917,7 +24917,7 @@
                           <a:ea typeface="Malgun Gothic"/>
                           <a:cs typeface="Malgun Gothic"/>
                         </a:rPr>
-                        <a:t>잔차의 미분을 무시, 자료 밖 위험</a:t>
+                        <a:t>잔차의 미분을 무시, 데이터 분포 밖 위험</a:t>
                       </a:r>
                     </a:p>
                   </a:txBody>
@@ -25826,7 +25826,7 @@
                 <a:ea typeface="Malgun Gothic"/>
                 <a:cs typeface="Malgun Gothic"/>
               </a:rPr>
-              <a:t>3 제어의 2장(LQR, 이동 지평)과 4장(잔차·GP). 볼록성·KKT·뉴턴법(0장에서 정리).</a:t>
+              <a:t>3 제어의 2장(LQR, receding horizon)과 4장(잔차·GP). 볼록성·KKT·뉴턴법(0장에서 정리).</a:t>
             </a:r>
           </a:p>
         </p:txBody>
@@ -26482,10 +26482,10 @@
                 <a:tableStyleId>{5C22544A-7EE6-4342-B048-85BDC9FD1C3A}</a:tableStyleId>
               </a:tblPr>
               <a:tblGrid>
-                <a:gridCol w="3675757"/>
-                <a:gridCol w="1247973"/>
-                <a:gridCol w="4117975"/>
-                <a:gridCol w="1727895"/>
+                <a:gridCol w="3480296"/>
+                <a:gridCol w="1181596"/>
+                <a:gridCol w="4471690"/>
+                <a:gridCol w="1636018"/>
               </a:tblGrid>
               <a:tr h="270887">
                 <a:tc>
@@ -26600,7 +26600,7 @@
                           <a:ea typeface="Malgun Gothic"/>
                           <a:cs typeface="Malgun Gothic"/>
                         </a:rPr>
-                        <a:t>확산 초기해 MPC (RA-L 2026)</a:t>
+                        <a:t>diffusion 초기해 MPC (RA-L 2026)</a:t>
                       </a:r>
                     </a:p>
                   </a:txBody>
@@ -26648,7 +26648,7 @@
                           <a:ea typeface="Malgun Gothic"/>
                           <a:cs typeface="Malgun Gothic"/>
                         </a:rPr>
-                        <a:t>확산 초안을 SDF hard 제약 OCP가 다듬는다</a:t>
+                        <a:t>diffusion 초안을 SDF hard 제약 OCP가 다듬는다</a:t>
                       </a:r>
                     </a:p>
                   </a:txBody>
@@ -26844,7 +26844,7 @@
                           <a:ea typeface="Malgun Gothic"/>
                           <a:cs typeface="Malgun Gothic"/>
                         </a:rPr>
-                        <a:t>수축 계량 위 스칼라 튜브로 GP 오차 전파</a:t>
+                        <a:t>contraction metric 위의 스칼라 튜브로 GP 오차 전파</a:t>
                       </a:r>
                     </a:p>
                   </a:txBody>
@@ -26942,7 +26942,7 @@
                           <a:ea typeface="Malgun Gothic"/>
                           <a:cs typeface="Malgun Gothic"/>
                         </a:rPr>
-                        <a:t>기록에서 외란 상자, SDP로 튜브</a:t>
+                        <a:t>기록 데이터에서 외란 box, SDP로 튜브</a:t>
                       </a:r>
                     </a:p>
                   </a:txBody>
@@ -27040,7 +27040,7 @@
                           <a:ea typeface="Malgun Gothic"/>
                           <a:cs typeface="Malgun Gothic"/>
                         </a:rPr>
-                        <a:t>3차원 강체 모델 + 에너지 안정 여유, GPU 표본</a:t>
+                        <a:t>3차원 강체 모델 + 에너지 안정 여유, GPU 샘플링</a:t>
                       </a:r>
                     </a:p>
                   </a:txBody>
@@ -27236,7 +27236,7 @@
                           <a:ea typeface="Malgun Gothic"/>
                           <a:cs typeface="Malgun Gothic"/>
                         </a:rPr>
-                        <a:t>잔차에 에너지 증가 벌점 — 비물리적 가속 방지</a:t>
+                        <a:t>잔차에 에너지 증가 페널티 — 비물리적 가속 방지</a:t>
                       </a:r>
                     </a:p>
                   </a:txBody>
@@ -28179,7 +28179,7 @@
                 <a:ea typeface="Malgun Gothic"/>
                 <a:cs typeface="Malgun Gothic"/>
               </a:rPr>
-              <a:t>GP 오차 상한, 외란 상자, 오차 불변 집합 — 모두 ρ_k의 자리.</a:t>
+              <a:t>GP 오차 상한, 외란 box, 오차 불변 집합 — 모두 ρ_k의 자리.</a:t>
             </a:r>
           </a:p>
         </p:txBody>
@@ -28482,7 +28482,7 @@
                 <a:ea typeface="Malgun Gothic"/>
                 <a:cs typeface="Malgun Gothic"/>
               </a:rPr>
-              <a:t>확산 궤적, RL 정책, 전역 경로가 위상 선택을 맡는다.</a:t>
+              <a:t>diffusion 궤적, RL 정책, 전역 경로가 위상 선택을 맡는다.</a:t>
             </a:r>
           </a:p>
         </p:txBody>
@@ -28809,9 +28809,9 @@
                 <a:tableStyleId>{5C22544A-7EE6-4342-B048-85BDC9FD1C3A}</a:tableStyleId>
               </a:tblPr>
               <a:tblGrid>
-                <a:gridCol w="3113286"/>
-                <a:gridCol w="3581102"/>
-                <a:gridCol w="4075212"/>
+                <a:gridCol w="2940844"/>
+                <a:gridCol w="3731716"/>
+                <a:gridCol w="4097040"/>
               </a:tblGrid>
               <a:tr h="278224">
                 <a:tc>
@@ -29024,7 +29024,7 @@
                           <a:ea typeface="Malgun Gothic"/>
                           <a:cs typeface="Malgun Gothic"/>
                         </a:rPr>
-                        <a:t>상자(단순, 크기를 자료로)</a:t>
+                        <a:t>box(단순, 크기를 데이터로)</a:t>
                       </a:r>
                     </a:p>
                   </a:txBody>
@@ -29074,7 +29074,7 @@
                           <a:ea typeface="Malgun Gothic"/>
                           <a:cs typeface="Malgun Gothic"/>
                         </a:rPr>
-                        <a:t>기울기(매끄러운 모델)</a:t>
+                        <a:t>gradient(매끄러운 모델)</a:t>
                       </a:r>
                     </a:p>
                   </a:txBody>
@@ -29098,7 +29098,7 @@
                           <a:ea typeface="Malgun Gothic"/>
                           <a:cs typeface="Malgun Gothic"/>
                         </a:rPr>
-                        <a:t>표본(접촉·이탈을 그대로)</a:t>
+                        <a:t>샘플(접촉·이탈을 그대로)</a:t>
                       </a:r>
                     </a:p>
                   </a:txBody>
@@ -29124,7 +29124,7 @@
                           <a:ea typeface="Malgun Gothic"/>
                           <a:cs typeface="Malgun Gothic"/>
                         </a:rPr>
-                        <a:t>구동 한계</a:t>
+                        <a:t>액추에이터 한계</a:t>
                       </a:r>
                     </a:p>
                   </a:txBody>
@@ -29148,7 +29148,7 @@
                           <a:ea typeface="Malgun Gothic"/>
                           <a:cs typeface="Malgun Gothic"/>
                         </a:rPr>
-                        <a:t>상자 근사</a:t>
+                        <a:t>box 근사</a:t>
                       </a:r>
                     </a:p>
                   </a:txBody>
@@ -29439,7 +29439,7 @@
                 <a:ea typeface="Malgun Gothic"/>
                 <a:cs typeface="Malgun Gothic"/>
               </a:rPr>
-              <a:t>NMPC를 만드는 선택을 한 표로 본다</a:t>
+              <a:t>NMPC를 만드는 선택을 한 표로 정리한다</a:t>
             </a:r>
           </a:p>
         </p:txBody>
@@ -29463,10 +29463,10 @@
                 <a:tableStyleId>{5C22544A-7EE6-4342-B048-85BDC9FD1C3A}</a:tableStyleId>
               </a:tblPr>
               <a:tblGrid>
-                <a:gridCol w="1333798"/>
-                <a:gridCol w="3151584"/>
-                <a:gridCol w="2648049"/>
-                <a:gridCol w="3636169"/>
+                <a:gridCol w="1324967"/>
+                <a:gridCol w="3130748"/>
+                <a:gridCol w="2630488"/>
+                <a:gridCol w="3683397"/>
               </a:tblGrid>
               <a:tr h="285477">
                 <a:tc>
@@ -29629,7 +29629,7 @@
                           <a:ea typeface="Malgun Gothic"/>
                           <a:cs typeface="Malgun Gothic"/>
                         </a:rPr>
-                        <a:t>가속 한계가 상자</a:t>
+                        <a:t>가속 한계가 box 제약</a:t>
                       </a:r>
                     </a:p>
                   </a:txBody>
@@ -29751,7 +29751,7 @@
                           <a:ea typeface="Malgun Gothic"/>
                           <a:cs typeface="Malgun Gothic"/>
                         </a:rPr>
-                        <a:t>강성 시스템이면 암시적 적분기</a:t>
+                        <a:t>stiff 시스템이면 implicit 적분기</a:t>
                       </a:r>
                     </a:p>
                   </a:txBody>
@@ -30143,7 +30143,7 @@
                           <a:ea typeface="Malgun Gothic"/>
                           <a:cs typeface="Malgun Gothic"/>
                         </a:rPr>
-                        <a:t>위상 선택은 위층·학습에</a:t>
+                        <a:t>위상 선택은 상위 계층·학습에</a:t>
                       </a:r>
                     </a:p>
                   </a:txBody>
@@ -30332,7 +30332,7 @@
         <p:spPr>
           <a:xfrm>
             <a:off x="711200" y="781050"/>
-            <a:ext cx="11118088" cy="554335"/>
+            <a:ext cx="11118088" cy="1057870"/>
           </a:xfrm>
           <a:prstGeom prst="rect">
             <a:avLst/>
@@ -30359,7 +30359,7 @@
                 <a:ea typeface="Malgun Gothic"/>
                 <a:cs typeface="Malgun Gothic"/>
               </a:rPr>
-              <a:t>NMPC가 이상하면 먼저 스케일링, 불능, 시간, 명령 경로를 의심한다</a:t>
+              <a:t>NMPC가 이상하면 먼저 스케일링, infeasible, 시간, 명령 경로를 의심한다</a:t>
             </a:r>
           </a:p>
         </p:txBody>
@@ -30372,7 +30372,7 @@
         </p:nvSpPr>
         <p:spPr>
           <a:xfrm>
-            <a:off x="711200" y="1361678"/>
+            <a:off x="711200" y="1764506"/>
             <a:ext cx="5308600" cy="1041301"/>
           </a:xfrm>
           <a:prstGeom prst="roundRect">
@@ -30403,7 +30403,7 @@
         </p:nvSpPr>
         <p:spPr>
           <a:xfrm>
-            <a:off x="711200" y="1361678"/>
+            <a:off x="711200" y="1764506"/>
             <a:ext cx="5308600" cy="6350"/>
           </a:xfrm>
           <a:prstGeom prst="rect">
@@ -30432,7 +30432,7 @@
         </p:nvSpPr>
         <p:spPr>
           <a:xfrm>
-            <a:off x="6013450" y="1361678"/>
+            <a:off x="6013450" y="1764506"/>
             <a:ext cx="6350" cy="1041301"/>
           </a:xfrm>
           <a:prstGeom prst="rect">
@@ -30461,7 +30461,7 @@
         </p:nvSpPr>
         <p:spPr>
           <a:xfrm>
-            <a:off x="711200" y="2396629"/>
+            <a:off x="711200" y="2799457"/>
             <a:ext cx="5308600" cy="6350"/>
           </a:xfrm>
           <a:prstGeom prst="rect">
@@ -30490,7 +30490,7 @@
         </p:nvSpPr>
         <p:spPr>
           <a:xfrm>
-            <a:off x="711200" y="1361678"/>
+            <a:off x="711200" y="1764506"/>
             <a:ext cx="50800" cy="1041301"/>
           </a:xfrm>
           <a:prstGeom prst="roundRect">
@@ -30521,7 +30521,7 @@
         </p:nvSpPr>
         <p:spPr>
           <a:xfrm>
-            <a:off x="927100" y="1507728"/>
+            <a:off x="927100" y="1910556"/>
             <a:ext cx="5094288" cy="339651"/>
           </a:xfrm>
           <a:prstGeom prst="rect">
@@ -30562,7 +30562,7 @@
         </p:nvSpPr>
         <p:spPr>
           <a:xfrm>
-            <a:off x="927100" y="1815009"/>
+            <a:off x="927100" y="2217837"/>
             <a:ext cx="5094288" cy="603200"/>
           </a:xfrm>
           <a:prstGeom prst="rect">
@@ -30603,7 +30603,7 @@
         </p:nvSpPr>
         <p:spPr>
           <a:xfrm>
-            <a:off x="6172200" y="1361678"/>
+            <a:off x="6172200" y="1764506"/>
             <a:ext cx="5308600" cy="1041301"/>
           </a:xfrm>
           <a:prstGeom prst="roundRect">
@@ -30634,7 +30634,7 @@
         </p:nvSpPr>
         <p:spPr>
           <a:xfrm>
-            <a:off x="6172200" y="1361678"/>
+            <a:off x="6172200" y="1764506"/>
             <a:ext cx="5308600" cy="6350"/>
           </a:xfrm>
           <a:prstGeom prst="rect">
@@ -30663,7 +30663,7 @@
         </p:nvSpPr>
         <p:spPr>
           <a:xfrm>
-            <a:off x="11474450" y="1361678"/>
+            <a:off x="11474450" y="1764506"/>
             <a:ext cx="6350" cy="1041301"/>
           </a:xfrm>
           <a:prstGeom prst="rect">
@@ -30692,7 +30692,7 @@
         </p:nvSpPr>
         <p:spPr>
           <a:xfrm>
-            <a:off x="6172200" y="2396629"/>
+            <a:off x="6172200" y="2799457"/>
             <a:ext cx="5308600" cy="6350"/>
           </a:xfrm>
           <a:prstGeom prst="rect">
@@ -30721,7 +30721,7 @@
         </p:nvSpPr>
         <p:spPr>
           <a:xfrm>
-            <a:off x="6172200" y="1361678"/>
+            <a:off x="6172200" y="1764506"/>
             <a:ext cx="50800" cy="1041301"/>
           </a:xfrm>
           <a:prstGeom prst="roundRect">
@@ -30752,7 +30752,7 @@
         </p:nvSpPr>
         <p:spPr>
           <a:xfrm>
-            <a:off x="6388100" y="1507728"/>
+            <a:off x="6388100" y="1910556"/>
             <a:ext cx="5094288" cy="339651"/>
           </a:xfrm>
           <a:prstGeom prst="rect">
@@ -30780,7 +30780,7 @@
                 <a:ea typeface="Malgun Gothic"/>
                 <a:cs typeface="Malgun Gothic"/>
               </a:rPr>
-              <a:t>불능(infeasible)</a:t>
+              <a:t>infeasible</a:t>
             </a:r>
           </a:p>
         </p:txBody>
@@ -30793,7 +30793,7 @@
         </p:nvSpPr>
         <p:spPr>
           <a:xfrm>
-            <a:off x="6388100" y="1815009"/>
+            <a:off x="6388100" y="2217837"/>
             <a:ext cx="5094288" cy="327000"/>
           </a:xfrm>
           <a:prstGeom prst="rect">
@@ -30834,7 +30834,7 @@
         </p:nvSpPr>
         <p:spPr>
           <a:xfrm>
-            <a:off x="711200" y="2555379"/>
+            <a:off x="711200" y="2958207"/>
             <a:ext cx="5308600" cy="1041301"/>
           </a:xfrm>
           <a:prstGeom prst="roundRect">
@@ -30865,7 +30865,7 @@
         </p:nvSpPr>
         <p:spPr>
           <a:xfrm>
-            <a:off x="711200" y="2555379"/>
+            <a:off x="711200" y="2958207"/>
             <a:ext cx="5308600" cy="6350"/>
           </a:xfrm>
           <a:prstGeom prst="rect">
@@ -30894,7 +30894,7 @@
         </p:nvSpPr>
         <p:spPr>
           <a:xfrm>
-            <a:off x="6013450" y="2555379"/>
+            <a:off x="6013450" y="2958207"/>
             <a:ext cx="6350" cy="1041301"/>
           </a:xfrm>
           <a:prstGeom prst="rect">
@@ -30923,7 +30923,7 @@
         </p:nvSpPr>
         <p:spPr>
           <a:xfrm>
-            <a:off x="711200" y="3590330"/>
+            <a:off x="711200" y="3993158"/>
             <a:ext cx="5308600" cy="6350"/>
           </a:xfrm>
           <a:prstGeom prst="rect">
@@ -30952,7 +30952,7 @@
         </p:nvSpPr>
         <p:spPr>
           <a:xfrm>
-            <a:off x="711200" y="2555379"/>
+            <a:off x="711200" y="2958207"/>
             <a:ext cx="50800" cy="1041301"/>
           </a:xfrm>
           <a:prstGeom prst="roundRect">
@@ -30983,7 +30983,7 @@
         </p:nvSpPr>
         <p:spPr>
           <a:xfrm>
-            <a:off x="927100" y="2701429"/>
+            <a:off x="927100" y="3104257"/>
             <a:ext cx="5094288" cy="339651"/>
           </a:xfrm>
           <a:prstGeom prst="rect">
@@ -31024,7 +31024,7 @@
         </p:nvSpPr>
         <p:spPr>
           <a:xfrm>
-            <a:off x="927100" y="3008709"/>
+            <a:off x="927100" y="3411538"/>
             <a:ext cx="5094288" cy="327000"/>
           </a:xfrm>
           <a:prstGeom prst="rect">
@@ -31065,7 +31065,7 @@
         </p:nvSpPr>
         <p:spPr>
           <a:xfrm>
-            <a:off x="6172200" y="2555379"/>
+            <a:off x="6172200" y="2958207"/>
             <a:ext cx="5308600" cy="1041301"/>
           </a:xfrm>
           <a:prstGeom prst="roundRect">
@@ -31096,7 +31096,7 @@
         </p:nvSpPr>
         <p:spPr>
           <a:xfrm>
-            <a:off x="6172200" y="2555379"/>
+            <a:off x="6172200" y="2958207"/>
             <a:ext cx="5308600" cy="6350"/>
           </a:xfrm>
           <a:prstGeom prst="rect">
@@ -31125,7 +31125,7 @@
         </p:nvSpPr>
         <p:spPr>
           <a:xfrm>
-            <a:off x="11474450" y="2555379"/>
+            <a:off x="11474450" y="2958207"/>
             <a:ext cx="6350" cy="1041301"/>
           </a:xfrm>
           <a:prstGeom prst="rect">
@@ -31154,7 +31154,7 @@
         </p:nvSpPr>
         <p:spPr>
           <a:xfrm>
-            <a:off x="6172200" y="3590330"/>
+            <a:off x="6172200" y="3993158"/>
             <a:ext cx="5308600" cy="6350"/>
           </a:xfrm>
           <a:prstGeom prst="rect">
@@ -31183,7 +31183,7 @@
         </p:nvSpPr>
         <p:spPr>
           <a:xfrm>
-            <a:off x="6172200" y="2555379"/>
+            <a:off x="6172200" y="2958207"/>
             <a:ext cx="50800" cy="1041301"/>
           </a:xfrm>
           <a:prstGeom prst="roundRect">
@@ -31214,7 +31214,7 @@
         </p:nvSpPr>
         <p:spPr>
           <a:xfrm>
-            <a:off x="6388100" y="2701429"/>
+            <a:off x="6388100" y="3104257"/>
             <a:ext cx="5094288" cy="339651"/>
           </a:xfrm>
           <a:prstGeom prst="rect">
@@ -31255,7 +31255,7 @@
         </p:nvSpPr>
         <p:spPr>
           <a:xfrm>
-            <a:off x="6388100" y="3008709"/>
+            <a:off x="6388100" y="3411538"/>
             <a:ext cx="5094288" cy="603200"/>
           </a:xfrm>
           <a:prstGeom prst="rect">
@@ -31296,12 +31296,12 @@
         </p:nvSpPr>
         <p:spPr>
           <a:xfrm>
-            <a:off x="711200" y="3749080"/>
-            <a:ext cx="5308600" cy="820341"/>
+            <a:off x="711200" y="4151908"/>
+            <a:ext cx="5308600" cy="1041301"/>
           </a:xfrm>
           <a:prstGeom prst="roundRect">
             <a:avLst>
-              <a:gd name="adj" fmla="val 9288"/>
+              <a:gd name="adj" fmla="val 7317"/>
             </a:avLst>
           </a:prstGeom>
           <a:solidFill>
@@ -31327,7 +31327,7 @@
         </p:nvSpPr>
         <p:spPr>
           <a:xfrm>
-            <a:off x="711200" y="3749080"/>
+            <a:off x="711200" y="4151908"/>
             <a:ext cx="5308600" cy="6350"/>
           </a:xfrm>
           <a:prstGeom prst="rect">
@@ -31356,8 +31356,8 @@
         </p:nvSpPr>
         <p:spPr>
           <a:xfrm>
-            <a:off x="6013450" y="3749080"/>
-            <a:ext cx="6350" cy="820341"/>
+            <a:off x="6013450" y="4151908"/>
+            <a:ext cx="6350" cy="1041301"/>
           </a:xfrm>
           <a:prstGeom prst="rect">
             <a:avLst/>
@@ -31385,7 +31385,7 @@
         </p:nvSpPr>
         <p:spPr>
           <a:xfrm>
-            <a:off x="711200" y="4563070"/>
+            <a:off x="711200" y="5186859"/>
             <a:ext cx="5308600" cy="6350"/>
           </a:xfrm>
           <a:prstGeom prst="rect">
@@ -31414,8 +31414,8 @@
         </p:nvSpPr>
         <p:spPr>
           <a:xfrm>
-            <a:off x="711200" y="3749080"/>
-            <a:ext cx="50800" cy="820341"/>
+            <a:off x="711200" y="4151908"/>
+            <a:ext cx="50800" cy="1041301"/>
           </a:xfrm>
           <a:prstGeom prst="roundRect">
             <a:avLst>
@@ -31445,7 +31445,7 @@
         </p:nvSpPr>
         <p:spPr>
           <a:xfrm>
-            <a:off x="927100" y="3895130"/>
+            <a:off x="927100" y="4297958"/>
             <a:ext cx="5094288" cy="339651"/>
           </a:xfrm>
           <a:prstGeom prst="rect">
@@ -31486,7 +31486,7 @@
         </p:nvSpPr>
         <p:spPr>
           <a:xfrm>
-            <a:off x="927100" y="4202410"/>
+            <a:off x="927100" y="4605238"/>
             <a:ext cx="5094288" cy="327000"/>
           </a:xfrm>
           <a:prstGeom prst="rect">
@@ -31527,12 +31527,12 @@
         </p:nvSpPr>
         <p:spPr>
           <a:xfrm>
-            <a:off x="6172200" y="3749080"/>
-            <a:ext cx="5308600" cy="820341"/>
+            <a:off x="6172200" y="4151908"/>
+            <a:ext cx="5308600" cy="1041301"/>
           </a:xfrm>
           <a:prstGeom prst="roundRect">
             <a:avLst>
-              <a:gd name="adj" fmla="val 9288"/>
+              <a:gd name="adj" fmla="val 7317"/>
             </a:avLst>
           </a:prstGeom>
           <a:solidFill>
@@ -31558,7 +31558,7 @@
         </p:nvSpPr>
         <p:spPr>
           <a:xfrm>
-            <a:off x="6172200" y="3749080"/>
+            <a:off x="6172200" y="4151908"/>
             <a:ext cx="5308600" cy="6350"/>
           </a:xfrm>
           <a:prstGeom prst="rect">
@@ -31587,8 +31587,8 @@
         </p:nvSpPr>
         <p:spPr>
           <a:xfrm>
-            <a:off x="11474450" y="3749080"/>
-            <a:ext cx="6350" cy="820341"/>
+            <a:off x="11474450" y="4151908"/>
+            <a:ext cx="6350" cy="1041301"/>
           </a:xfrm>
           <a:prstGeom prst="rect">
             <a:avLst/>
@@ -31616,7 +31616,7 @@
         </p:nvSpPr>
         <p:spPr>
           <a:xfrm>
-            <a:off x="6172200" y="4563070"/>
+            <a:off x="6172200" y="5186859"/>
             <a:ext cx="5308600" cy="6350"/>
           </a:xfrm>
           <a:prstGeom prst="rect">
@@ -31645,8 +31645,8 @@
         </p:nvSpPr>
         <p:spPr>
           <a:xfrm>
-            <a:off x="6172200" y="3749080"/>
-            <a:ext cx="50800" cy="820341"/>
+            <a:off x="6172200" y="4151908"/>
+            <a:ext cx="50800" cy="1041301"/>
           </a:xfrm>
           <a:prstGeom prst="roundRect">
             <a:avLst>
@@ -31676,7 +31676,7 @@
         </p:nvSpPr>
         <p:spPr>
           <a:xfrm>
-            <a:off x="6388100" y="3895130"/>
+            <a:off x="6388100" y="4297958"/>
             <a:ext cx="5094288" cy="339651"/>
           </a:xfrm>
           <a:prstGeom prst="rect">
@@ -31704,7 +31704,7 @@
                 <a:ea typeface="Malgun Gothic"/>
                 <a:cs typeface="Malgun Gothic"/>
               </a:rPr>
-              <a:t>학습 잔차의 자료 밖</a:t>
+              <a:t>학습 잔차의 데이터 분포 밖</a:t>
             </a:r>
           </a:p>
         </p:txBody>
@@ -31717,8 +31717,8 @@
         </p:nvSpPr>
         <p:spPr>
           <a:xfrm>
-            <a:off x="6388100" y="4202410"/>
-            <a:ext cx="5094288" cy="327000"/>
+            <a:off x="6388100" y="4605238"/>
+            <a:ext cx="5094288" cy="603200"/>
           </a:xfrm>
           <a:prstGeom prst="rect">
             <a:avLst/>
@@ -31745,7 +31745,7 @@
                 <a:ea typeface="Malgun Gothic"/>
                 <a:cs typeface="Malgun Gothic"/>
               </a:rPr>
-              <a:t>잔차가 자료 밖에서 튀면 MPC가 이용한다. 자료 범위와 예측을 함께 기록한다.</a:t>
+              <a:t>잔차가 데이터 분포 밖에서 튀면 MPC가 이용한다. 데이터 범위와 예측을 함께 기록한다.</a:t>
             </a:r>
           </a:p>
         </p:txBody>
@@ -32459,7 +32459,7 @@
                 <a:ea typeface="Malgun Gothic"/>
                 <a:cs typeface="Malgun Gothic"/>
               </a:rPr>
-              <a:t>뉴턴, 선 탐색, KKT, SQP, 내점법.</a:t>
+              <a:t>뉴턴, line search, KKT, SQP, 내점법.</a:t>
             </a:r>
           </a:p>
         </p:txBody>
@@ -32622,7 +32622,7 @@
         <p:spPr>
           <a:xfrm>
             <a:off x="8208367" y="1507728"/>
-            <a:ext cx="698302" cy="241300"/>
+            <a:ext cx="584994" cy="241300"/>
           </a:xfrm>
           <a:prstGeom prst="roundRect">
             <a:avLst>
@@ -32653,7 +32653,7 @@
         <p:spPr>
           <a:xfrm>
             <a:off x="8297267" y="1533128"/>
-            <a:ext cx="561517" cy="288925"/>
+            <a:ext cx="444810" cy="288925"/>
           </a:xfrm>
           <a:prstGeom prst="rect">
             <a:avLst/>
@@ -32680,7 +32680,7 @@
                 <a:ea typeface="Malgun Gothic"/>
                 <a:cs typeface="Malgun Gothic"/>
               </a:rPr>
-              <a:t>3 · 손으로</a:t>
+              <a:t>3 · 실습</a:t>
             </a:r>
           </a:p>
         </p:txBody>
@@ -32786,8 +32786,8 @@
                 <a:tableStyleId>{5C22544A-7EE6-4342-B048-85BDC9FD1C3A}</a:tableStyleId>
               </a:tblPr>
               <a:tblGrid>
-                <a:gridCol w="1473994"/>
-                <a:gridCol w="9295606"/>
+                <a:gridCol w="1440160"/>
+                <a:gridCol w="9329440"/>
               </a:tblGrid>
               <a:tr h="285477">
                 <a:tc>
@@ -32878,7 +32878,7 @@
                           <a:ea typeface="Malgun Gothic"/>
                           <a:cs typeface="Malgun Gothic"/>
                         </a:rPr>
-                        <a:t>속도를 상태로 두면 왜 가속 한계가 쉬워지나? L1 벌점은 언제 hard와 같아지나?</a:t>
+                        <a:t>속도를 상태로 두면 왜 가속 한계가 쉬워지나? L1 페널티는 언제 hard와 같아지나?</a:t>
                       </a:r>
                     </a:p>
                   </a:txBody>
@@ -32928,7 +32928,7 @@
                           <a:ea typeface="Malgun Gothic"/>
                           <a:cs typeface="Malgun Gothic"/>
                         </a:rPr>
-                        <a:t>RTI는 왜 한 걸음으로 충분한가? 언제 부족한가?</a:t>
+                        <a:t>RTI는 왜 한 스텝으로 충분한가? 언제 부족한가?</a:t>
                       </a:r>
                     </a:p>
                   </a:txBody>
@@ -34020,7 +34020,7 @@
                 <a:ea typeface="Malgun Gothic"/>
                 <a:cs typeface="Malgun Gothic"/>
               </a:rPr>
-              <a:t>위상 선택은 기울기가 못 한다. 위층·학습이 준다.</a:t>
+              <a:t>위상 선택은 gradient가 못 한다. 상위 계층·학습이 준다.</a:t>
             </a:r>
           </a:p>
         </p:txBody>
@@ -34903,7 +34903,7 @@
                           <a:ea typeface="Malgun Gothic"/>
                           <a:cs typeface="Malgun Gothic"/>
                         </a:rPr>
-                        <a:t>한 주기에 SQP 한 걸음이 충분한 이유</a:t>
+                        <a:t>한 주기에 SQP 한 스텝이 충분한 이유</a:t>
                       </a:r>
                     </a:p>
                   </a:txBody>
@@ -35429,7 +35429,7 @@
                 <a:ea typeface="Malgun Gothic"/>
                 <a:cs typeface="Malgun Gothic"/>
               </a:rPr>
-              <a:t> — 확산 초기해 MPC 2601.02873 · RL 유도 PAC-NMPC 2609.39854 · 비평면 재귀 희소 GP 2602.16206 · 에너지 정규화 NN 잔차 2604.14678 · 고속 전지형 자율주행 2603.20525</a:t>
+              <a:t> — diffusion 초기해 MPC 2601.02873 · RL 유도 PAC-NMPC 2609.39854 · 비평면 재귀 희소 GP 2602.16206 · 에너지 정규화 NN 잔차 2604.14678 · 고속 전지형 자율주행 2603.20525</a:t>
             </a:r>
           </a:p>
         </p:txBody>
@@ -36901,7 +36901,7 @@
                 <a:ea typeface="Malgun Gothic"/>
                 <a:cs typeface="Malgun Gothic"/>
               </a:rPr>
-              <a:t>표본 기반 MPC는 비매끄러운 비용을, NMPC는 제약을 잘 다룬다</a:t>
+              <a:t>샘플 기반 MPC는 non-smooth 비용을, NMPC는 제약을 잘 다룬다</a:t>
             </a:r>
           </a:p>
         </p:txBody>
@@ -37122,7 +37122,7 @@
                 <a:ea typeface="Malgun Gothic"/>
                 <a:cs typeface="Malgun Gothic"/>
               </a:rPr>
-              <a:t>표본 기반 (MPPI)</a:t>
+              <a:t>샘플 기반 (MPPI)</a:t>
             </a:r>
           </a:p>
         </p:txBody>
@@ -37163,7 +37163,7 @@
                 <a:ea typeface="Malgun Gothic"/>
                 <a:cs typeface="Malgun Gothic"/>
               </a:rPr>
-              <a:t>표본으로 절벽 같은 비용을 넘는다</a:t>
+              <a:t>샘플로 절벽 같은 비용을 넘는다</a:t>
             </a:r>
           </a:p>
         </p:txBody>
@@ -37292,7 +37292,7 @@
                 <a:ea typeface="Malgun Gothic"/>
                 <a:cs typeface="Malgun Gothic"/>
               </a:rPr>
-              <a:t>제약은 벌점·확률로 근사</a:t>
+              <a:t>제약은 페널티·확률로 근사</a:t>
             </a:r>
           </a:p>
         </p:txBody>
@@ -37455,7 +37455,7 @@
         <p:spPr>
           <a:xfrm>
             <a:off x="6438900" y="1507728"/>
-            <a:ext cx="1247676" cy="241300"/>
+            <a:ext cx="1400870" cy="241300"/>
           </a:xfrm>
           <a:prstGeom prst="roundRect">
             <a:avLst>
@@ -37486,7 +37486,7 @@
         <p:spPr>
           <a:xfrm>
             <a:off x="6527800" y="1533128"/>
-            <a:ext cx="1127372" cy="288925"/>
+            <a:ext cx="1285162" cy="288925"/>
           </a:xfrm>
           <a:prstGeom prst="rect">
             <a:avLst/>
@@ -37513,7 +37513,7 @@
                 <a:ea typeface="Malgun Gothic"/>
                 <a:cs typeface="Malgun Gothic"/>
               </a:rPr>
-              <a:t>기울기 기반 (NMPC)</a:t>
+              <a:t>gradient 기반 (NMPC)</a:t>
             </a:r>
           </a:p>
         </p:txBody>
@@ -38415,7 +38415,7 @@
                 <a:ea typeface="Malgun Gothic"/>
                 <a:cs typeface="Malgun Gothic"/>
               </a:rPr>
-              <a:t>무엇을 예측하고 무엇을 고르나. 입력을 변화율로 두면 가속 한계를 상자로 건다.</a:t>
+              <a:t>무엇을 예측하고 무엇을 고르나. 입력을 변화율로 두면 가속 한계가 box 제약이 된다.</a:t>
             </a:r>
           </a:p>
         </p:txBody>
@@ -38851,7 +38851,7 @@
         <p:spPr>
           <a:xfrm>
             <a:off x="8208367" y="2489398"/>
-            <a:ext cx="856059" cy="241300"/>
+            <a:ext cx="1069181" cy="241300"/>
           </a:xfrm>
           <a:prstGeom prst="roundRect">
             <a:avLst>
@@ -38882,7 +38882,7 @@
         <p:spPr>
           <a:xfrm>
             <a:off x="8297267" y="2514798"/>
-            <a:ext cx="724007" cy="288925"/>
+            <a:ext cx="943523" cy="288925"/>
           </a:xfrm>
           <a:prstGeom prst="rect">
             <a:avLst/>
@@ -38909,7 +38909,7 @@
                 <a:ea typeface="Malgun Gothic"/>
                 <a:cs typeface="Malgun Gothic"/>
               </a:rPr>
-              <a:t>3 · 지평·간격</a:t>
+              <a:t>3 · horizon·간격</a:t>
             </a:r>
           </a:p>
         </p:txBody>
@@ -39474,7 +39474,7 @@
                 <a:ea typeface="Malgun Gothic"/>
                 <a:cs typeface="Malgun Gothic"/>
               </a:rPr>
-              <a:t>입력·상태 상자, 장애물, 자세.</a:t>
+              <a:t>입력·상태 box, 장애물, 자세.</a:t>
             </a:r>
           </a:p>
         </p:txBody>
@@ -39769,7 +39769,7 @@
                 <a:ea typeface="Malgun Gothic"/>
                 <a:cs typeface="Malgun Gothic"/>
               </a:rPr>
-              <a:t>: 지평 너머를 대신한다.</a:t>
+              <a:t>: horizon 너머를 대신한다.</a:t>
             </a:r>
           </a:p>
         </p:txBody>
@@ -40044,7 +40044,7 @@
                 <a:ea typeface="Malgun Gothic"/>
                 <a:cs typeface="Malgun Gothic"/>
               </a:rPr>
-              <a:t>속도를 상태에 넣으면 가속 한계를 단순한 상자 제약으로 건다</a:t>
+              <a:t>속도를 상태에 넣으면 가속 한계를 단순한 box 제약으로 건다</a:t>
             </a:r>
           </a:p>
         </p:txBody>
@@ -40154,8 +40154,8 @@
                 <a:tableStyleId>{5C22544A-7EE6-4342-B048-85BDC9FD1C3A}</a:tableStyleId>
               </a:tblPr>
               <a:tblGrid>
-                <a:gridCol w="792460"/>
-                <a:gridCol w="4293890"/>
+                <a:gridCol w="721221"/>
+                <a:gridCol w="4365129"/>
               </a:tblGrid>
               <a:tr h="285477">
                 <a:tc>
@@ -40390,7 +40390,7 @@
                           <a:ea typeface="Malgun Gothic"/>
                           <a:cs typeface="Malgun Gothic"/>
                         </a:rPr>
-                        <a:t> — 둘 다 상자</a:t>
+                        <a:t> — 둘 다 box 제약</a:t>
                       </a:r>
                     </a:p>
                   </a:txBody>
@@ -40712,7 +40712,7 @@
                 <a:ea typeface="Malgun Gothic"/>
                 <a:cs typeface="Malgun Gothic"/>
               </a:rPr>
-              <a:t>가속·저크 한계가 상자 제약이 되고, 명령이 매끄럽다.</a:t>
+              <a:t>가속·저크 한계가 box 제약이 되고, 명령이 매끄럽다.</a:t>
             </a:r>
           </a:p>
         </p:txBody>
@@ -40974,7 +40974,7 @@
                 <a:ea typeface="Malgun Gothic"/>
                 <a:cs typeface="Malgun Gothic"/>
               </a:rPr>
-              <a:t>상태가 늘어 문제가 커진다. 실제 구동 지연은 여전히 모델 밖이다.</a:t>
+              <a:t>상태가 늘어 문제가 커진다. 실제 액추에이터 지연은 여전히 모델 밖이다.</a:t>
             </a:r>
           </a:p>
         </p:txBody>
@@ -41137,7 +41137,7 @@
         <p:spPr>
           <a:xfrm>
             <a:off x="8208367" y="3339604"/>
-            <a:ext cx="1257300" cy="241300"/>
+            <a:ext cx="1404144" cy="241300"/>
           </a:xfrm>
           <a:prstGeom prst="roundRect">
             <a:avLst>
@@ -41168,7 +41168,7 @@
         <p:spPr>
           <a:xfrm>
             <a:off x="8297267" y="3365004"/>
-            <a:ext cx="1137285" cy="288925"/>
+            <a:ext cx="1288534" cy="288925"/>
           </a:xfrm>
           <a:prstGeom prst="rect">
             <a:avLst/>
@@ -41195,7 +41195,7 @@
                 <a:ea typeface="Malgun Gothic"/>
                 <a:cs typeface="Malgun Gothic"/>
               </a:rPr>
-              <a:t>비매끄러운 하위 모델</a:t>
+              <a:t>non-smooth 하위 모델</a:t>
             </a:r>
           </a:p>
         </p:txBody>
@@ -41442,7 +41442,7 @@
                 <a:ea typeface="Malgun Gothic"/>
                 <a:cs typeface="Malgun Gothic"/>
               </a:rPr>
-              <a:t>반지름 1 m 원을 도는 유니사이클을 두 적분기로 굴렸다. (a) Δt = 0.4 s에서 Euler는 바깥으로 샌다 (b) Δt를 반으로 줄이면 Euler 오차는 약 1/2, RK4는 약 1/16로 준다</a:t>
+              <a:t>반지름 1 m 원을 도는 유니사이클을 두 적분기로 시뮬레이션했다. (a) Δt = 0.4 s에서 Euler는 바깥으로 샌다 (b) Δt를 반으로 줄이면 Euler 오차는 약 1/2, RK4는 약 1/16로 준다</a:t>
             </a:r>
           </a:p>
         </p:txBody>
